--- a/harness-template-structure.pptx
+++ b/harness-template-structure.pptx
@@ -13,6 +13,9 @@
     <p:sldId id="261" r:id="rId12"/>
     <p:sldId id="262" r:id="rId13"/>
     <p:sldId id="263" r:id="rId14"/>
+    <p:sldId id="270" r:id="rId21"/>
+    <p:sldId id="271" r:id="rId22"/>
+    <p:sldId id="272" r:id="rId23"/>
     <p:sldId id="264" r:id="rId15"/>
     <p:sldId id="265" r:id="rId16"/>
     <p:sldId id="266" r:id="rId17"/>
@@ -3371,7 +3374,7 @@
                 </a:solidFill>
                 <a:latin typeface="맑은 고딕"/>
               </a:rPr>
-              <a:t>바탕: main 브랜치 · harness-template</a:t>
+              <a:t>바탕: harness_gstack 브랜치 · Phase 1·2·3 (gstack 기반 업그레이드)</a:t>
             </a:r>
           </a:p>
         </p:txBody>
@@ -3661,7 +3664,7 @@
                 </a:solidFill>
                 <a:latin typeface="맑은 고딕"/>
               </a:rPr>
-              <a:t>10 / 14</a:t>
+              <a:t>13 / 17</a:t>
             </a:r>
           </a:p>
         </p:txBody>
@@ -5047,7 +5050,7 @@
                 </a:solidFill>
                 <a:latin typeface="맑은 고딕"/>
               </a:rPr>
-              <a:t>11 / 14</a:t>
+              <a:t>14 / 17</a:t>
             </a:r>
           </a:p>
         </p:txBody>
@@ -6530,7 +6533,7 @@
                 </a:solidFill>
                 <a:latin typeface="맑은 고딕"/>
               </a:rPr>
-              <a:t>12 / 14</a:t>
+              <a:t>15 / 17</a:t>
             </a:r>
           </a:p>
         </p:txBody>
@@ -7565,7 +7568,7 @@
                 </a:solidFill>
                 <a:latin typeface="맑은 고딕"/>
               </a:rPr>
-              <a:t>핵심 명령어 요약</a:t>
+              <a:t>기본 명령어 4개 (Phase 1·2·3 업그레이드 13개는 §9~11)</a:t>
             </a:r>
           </a:p>
         </p:txBody>
@@ -7644,7 +7647,7 @@
                 </a:solidFill>
                 <a:latin typeface="맑은 고딕"/>
               </a:rPr>
-              <a:t>13 / 14</a:t>
+              <a:t>16 / 17</a:t>
             </a:r>
           </a:p>
         </p:txBody>
@@ -9234,6 +9237,3528 @@
 </p:sld>
 </file>
 
+<file path=ppt/slides/slide15.xml><?xml version="1.0" encoding="utf-8"?>
+<p:sld xmlns:a="http://schemas.openxmlformats.org/drawingml/2006/main" xmlns:p="http://schemas.openxmlformats.org/presentationml/2006/main" xmlns:r="http://schemas.openxmlformats.org/officeDocument/2006/relationships">
+  <p:cSld>
+    <p:spTree>
+      <p:nvGrpSpPr>
+        <p:cNvPr id="1" name=""/>
+        <p:cNvGrpSpPr/>
+        <p:nvPr/>
+      </p:nvGrpSpPr>
+      <p:grpSpPr/>
+      <p:sp>
+        <p:nvSpPr>
+          <p:cNvPr id="2" name="Rectangle 1"/>
+          <p:cNvSpPr/>
+          <p:nvPr/>
+        </p:nvSpPr>
+        <p:spPr>
+          <a:xfrm>
+            <a:off x="0" y="0"/>
+            <a:ext cx="12191695" cy="6858000"/>
+          </a:xfrm>
+          <a:prstGeom prst="rect">
+            <a:avLst/>
+          </a:prstGeom>
+          <a:solidFill>
+            <a:srgbClr val="FFFFFF"/>
+          </a:solidFill>
+          <a:ln>
+            <a:noFill/>
+          </a:ln>
+          <a:effectLst/>
+        </p:spPr>
+        <p:style>
+          <a:lnRef idx="1">
+            <a:schemeClr val="accent1"/>
+          </a:lnRef>
+          <a:fillRef idx="3">
+            <a:schemeClr val="accent1"/>
+          </a:fillRef>
+          <a:effectRef idx="2">
+            <a:schemeClr val="accent1"/>
+          </a:effectRef>
+          <a:fontRef idx="minor">
+            <a:schemeClr val="lt1"/>
+          </a:fontRef>
+        </p:style>
+        <p:txBody>
+          <a:bodyPr rtlCol="0" anchor="ctr"/>
+          <a:lstStyle/>
+          <a:p>
+            <a:pPr algn="ctr"/>
+          </a:p>
+        </p:txBody>
+      </p:sp>
+      <p:sp>
+        <p:nvSpPr>
+          <p:cNvPr id="3" name="Rectangle 2"/>
+          <p:cNvSpPr/>
+          <p:nvPr/>
+        </p:nvSpPr>
+        <p:spPr>
+          <a:xfrm>
+            <a:off x="548640" y="502920"/>
+            <a:ext cx="109728" cy="438912"/>
+          </a:xfrm>
+          <a:prstGeom prst="rect">
+            <a:avLst/>
+          </a:prstGeom>
+          <a:solidFill>
+            <a:srgbClr val="1F4E79"/>
+          </a:solidFill>
+          <a:ln>
+            <a:noFill/>
+          </a:ln>
+          <a:effectLst/>
+        </p:spPr>
+        <p:style>
+          <a:lnRef idx="1">
+            <a:schemeClr val="accent1"/>
+          </a:lnRef>
+          <a:fillRef idx="3">
+            <a:schemeClr val="accent1"/>
+          </a:fillRef>
+          <a:effectRef idx="2">
+            <a:schemeClr val="accent1"/>
+          </a:effectRef>
+          <a:fontRef idx="minor">
+            <a:schemeClr val="lt1"/>
+          </a:fontRef>
+        </p:style>
+        <p:txBody>
+          <a:bodyPr rtlCol="0" anchor="ctr"/>
+          <a:lstStyle/>
+          <a:p>
+            <a:pPr algn="ctr"/>
+          </a:p>
+        </p:txBody>
+      </p:sp>
+      <p:sp>
+        <p:nvSpPr>
+          <p:cNvPr id="4" name="TextBox 3"/>
+          <p:cNvSpPr txBox="1"/>
+          <p:nvPr/>
+        </p:nvSpPr>
+        <p:spPr>
+          <a:xfrm>
+            <a:off x="777240" y="457200"/>
+            <a:ext cx="9144000" cy="274320"/>
+          </a:xfrm>
+          <a:prstGeom prst="rect">
+            <a:avLst/>
+          </a:prstGeom>
+          <a:noFill/>
+        </p:spPr>
+        <p:txBody>
+          <a:bodyPr wrap="square" lIns="0" rIns="0" tIns="0" bIns="0" anchor="t">
+            <a:spAutoFit/>
+          </a:bodyPr>
+          <a:lstStyle/>
+          <a:p>
+            <a:pPr algn="l"/>
+            <a:r>
+              <a:rPr sz="1100" b="1">
+                <a:solidFill>
+                  <a:srgbClr val="1F4E79"/>
+                </a:solidFill>
+                <a:latin typeface="맑은 고딕"/>
+              </a:rPr>
+              <a:t>PHASE 1 UPGRADE · Safety / Learn / Context</a:t>
+            </a:r>
+          </a:p>
+        </p:txBody>
+      </p:sp>
+      <p:sp>
+        <p:nvSpPr>
+          <p:cNvPr id="5" name="TextBox 4"/>
+          <p:cNvSpPr txBox="1"/>
+          <p:nvPr/>
+        </p:nvSpPr>
+        <p:spPr>
+          <a:xfrm>
+            <a:off x="777240" y="685800"/>
+            <a:ext cx="10515600" cy="502920"/>
+          </a:xfrm>
+          <a:prstGeom prst="rect">
+            <a:avLst/>
+          </a:prstGeom>
+          <a:noFill/>
+        </p:spPr>
+        <p:txBody>
+          <a:bodyPr wrap="square" lIns="0" rIns="0" tIns="0" bIns="0" anchor="t">
+            <a:spAutoFit/>
+          </a:bodyPr>
+          <a:lstStyle/>
+          <a:p>
+            <a:pPr algn="l"/>
+            <a:r>
+              <a:rPr sz="2600" b="1">
+                <a:solidFill>
+                  <a:srgbClr val="1F2A37"/>
+                </a:solidFill>
+                <a:latin typeface="맑은 고딕"/>
+              </a:rPr>
+              <a:t>프로젝트 로컬 안전장치 + 지식 누적</a:t>
+            </a:r>
+          </a:p>
+        </p:txBody>
+      </p:sp>
+      <p:sp>
+        <p:nvSpPr>
+          <p:cNvPr id="6" name="Rectangle 5"/>
+          <p:cNvSpPr/>
+          <p:nvPr/>
+        </p:nvSpPr>
+        <p:spPr>
+          <a:xfrm>
+            <a:off x="548640" y="1298448"/>
+            <a:ext cx="11091672" cy="9525"/>
+          </a:xfrm>
+          <a:prstGeom prst="rect">
+            <a:avLst/>
+          </a:prstGeom>
+          <a:solidFill>
+            <a:srgbClr val="E5E7EB"/>
+          </a:solidFill>
+          <a:ln>
+            <a:noFill/>
+          </a:ln>
+          <a:effectLst/>
+        </p:spPr>
+        <p:style>
+          <a:lnRef idx="1">
+            <a:schemeClr val="accent1"/>
+          </a:lnRef>
+          <a:fillRef idx="3">
+            <a:schemeClr val="accent1"/>
+          </a:fillRef>
+          <a:effectRef idx="2">
+            <a:schemeClr val="accent1"/>
+          </a:effectRef>
+          <a:fontRef idx="minor">
+            <a:schemeClr val="lt1"/>
+          </a:fontRef>
+        </p:style>
+        <p:txBody>
+          <a:bodyPr rtlCol="0" anchor="ctr"/>
+          <a:lstStyle/>
+          <a:p>
+            <a:pPr algn="ctr"/>
+          </a:p>
+        </p:txBody>
+      </p:sp>
+      <p:sp>
+        <p:nvSpPr>
+          <p:cNvPr id="7" name="TextBox 6"/>
+          <p:cNvSpPr txBox="1"/>
+          <p:nvPr/>
+        </p:nvSpPr>
+        <p:spPr>
+          <a:xfrm>
+            <a:off x="10972800" y="6446520"/>
+            <a:ext cx="1097280" cy="274320"/>
+          </a:xfrm>
+          <a:prstGeom prst="rect">
+            <a:avLst/>
+          </a:prstGeom>
+          <a:noFill/>
+        </p:spPr>
+        <p:txBody>
+          <a:bodyPr wrap="square" lIns="0" rIns="0" tIns="0" bIns="0" anchor="t">
+            <a:spAutoFit/>
+          </a:bodyPr>
+          <a:lstStyle/>
+          <a:p>
+            <a:pPr algn="r"/>
+            <a:r>
+              <a:rPr sz="1000" b="0">
+                <a:solidFill>
+                  <a:srgbClr val="6B7280"/>
+                </a:solidFill>
+                <a:latin typeface="맑은 고딕"/>
+              </a:rPr>
+              <a:t>9 / 17</a:t>
+            </a:r>
+          </a:p>
+        </p:txBody>
+      </p:sp>
+      <p:sp>
+        <p:nvSpPr>
+          <p:cNvPr id="8" name="TextBox 7"/>
+          <p:cNvSpPr txBox="1"/>
+          <p:nvPr/>
+        </p:nvSpPr>
+        <p:spPr>
+          <a:xfrm>
+            <a:off x="548640" y="6446520"/>
+            <a:ext cx="5486400" cy="274320"/>
+          </a:xfrm>
+          <a:prstGeom prst="rect">
+            <a:avLst/>
+          </a:prstGeom>
+          <a:noFill/>
+        </p:spPr>
+        <p:txBody>
+          <a:bodyPr wrap="square" lIns="0" rIns="0" tIns="0" bIns="0" anchor="t">
+            <a:spAutoFit/>
+          </a:bodyPr>
+          <a:lstStyle/>
+          <a:p>
+            <a:pPr algn="l"/>
+            <a:r>
+              <a:rPr sz="1000" b="0">
+                <a:solidFill>
+                  <a:srgbClr val="6B7280"/>
+                </a:solidFill>
+                <a:latin typeface="맑은 고딕"/>
+              </a:rPr>
+              <a:t>하네스 엔지니어링 템플릿 — harness-template</a:t>
+            </a:r>
+          </a:p>
+        </p:txBody>
+      </p:sp>
+      <p:sp>
+        <p:nvSpPr>
+          <p:cNvPr id="9" name="Rounded Rectangle 8"/>
+          <p:cNvSpPr/>
+          <p:nvPr/>
+        </p:nvSpPr>
+        <p:spPr>
+          <a:xfrm>
+            <a:off x="777240" y="1600200"/>
+            <a:ext cx="5056632" cy="2286000"/>
+          </a:xfrm>
+          <a:prstGeom prst="roundRect">
+            <a:avLst>
+              <a:gd name="adj" fmla="val 8000"/>
+            </a:avLst>
+          </a:prstGeom>
+          <a:solidFill>
+            <a:srgbClr val="FFFFFF"/>
+          </a:solidFill>
+          <a:ln w="9525">
+            <a:solidFill>
+              <a:srgbClr val="E5E7EB"/>
+            </a:solidFill>
+          </a:ln>
+          <a:effectLst/>
+        </p:spPr>
+        <p:style>
+          <a:lnRef idx="1">
+            <a:schemeClr val="accent1"/>
+          </a:lnRef>
+          <a:fillRef idx="3">
+            <a:schemeClr val="accent1"/>
+          </a:fillRef>
+          <a:effectRef idx="2">
+            <a:schemeClr val="accent1"/>
+          </a:effectRef>
+          <a:fontRef idx="minor">
+            <a:schemeClr val="lt1"/>
+          </a:fontRef>
+        </p:style>
+        <p:txBody>
+          <a:bodyPr rtlCol="0" anchor="ctr"/>
+          <a:lstStyle/>
+          <a:p>
+            <a:pPr algn="ctr"/>
+          </a:p>
+        </p:txBody>
+      </p:sp>
+      <p:sp>
+        <p:nvSpPr>
+          <p:cNvPr id="10" name="Rectangle 9"/>
+          <p:cNvSpPr/>
+          <p:nvPr/>
+        </p:nvSpPr>
+        <p:spPr>
+          <a:xfrm>
+            <a:off x="777240" y="1600200"/>
+            <a:ext cx="182880" cy="2286000"/>
+          </a:xfrm>
+          <a:prstGeom prst="rect">
+            <a:avLst/>
+          </a:prstGeom>
+          <a:solidFill>
+            <a:srgbClr val="1F4E79"/>
+          </a:solidFill>
+          <a:ln>
+            <a:noFill/>
+          </a:ln>
+          <a:effectLst/>
+        </p:spPr>
+        <p:style>
+          <a:lnRef idx="1">
+            <a:schemeClr val="accent1"/>
+          </a:lnRef>
+          <a:fillRef idx="3">
+            <a:schemeClr val="accent1"/>
+          </a:fillRef>
+          <a:effectRef idx="2">
+            <a:schemeClr val="accent1"/>
+          </a:effectRef>
+          <a:fontRef idx="minor">
+            <a:schemeClr val="lt1"/>
+          </a:fontRef>
+        </p:style>
+        <p:txBody>
+          <a:bodyPr rtlCol="0" anchor="ctr"/>
+          <a:lstStyle/>
+          <a:p>
+            <a:pPr algn="ctr"/>
+          </a:p>
+        </p:txBody>
+      </p:sp>
+      <p:sp>
+        <p:nvSpPr>
+          <p:cNvPr id="11" name="TextBox 10"/>
+          <p:cNvSpPr txBox="1"/>
+          <p:nvPr/>
+        </p:nvSpPr>
+        <p:spPr>
+          <a:xfrm>
+            <a:off x="1188720" y="1783080"/>
+            <a:ext cx="4507992" cy="365760"/>
+          </a:xfrm>
+          <a:prstGeom prst="rect">
+            <a:avLst/>
+          </a:prstGeom>
+          <a:noFill/>
+        </p:spPr>
+        <p:txBody>
+          <a:bodyPr wrap="square" lIns="0" rIns="0" tIns="0" bIns="0" anchor="t">
+            <a:spAutoFit/>
+          </a:bodyPr>
+          <a:lstStyle/>
+          <a:p>
+            <a:pPr algn="l"/>
+            <a:r>
+              <a:rPr sz="1600" b="1">
+                <a:solidFill>
+                  <a:srgbClr val="1F4E79"/>
+                </a:solidFill>
+                <a:latin typeface="D2Coding, Consolas, Menlo"/>
+              </a:rPr>
+              <a:t>/project:freeze · unfreeze · guard</a:t>
+            </a:r>
+          </a:p>
+        </p:txBody>
+      </p:sp>
+      <p:sp>
+        <p:nvSpPr>
+          <p:cNvPr id="12" name="TextBox 11"/>
+          <p:cNvSpPr txBox="1"/>
+          <p:nvPr/>
+        </p:nvSpPr>
+        <p:spPr>
+          <a:xfrm>
+            <a:off x="1188720" y="2194560"/>
+            <a:ext cx="4507992" cy="365760"/>
+          </a:xfrm>
+          <a:prstGeom prst="rect">
+            <a:avLst/>
+          </a:prstGeom>
+          <a:noFill/>
+        </p:spPr>
+        <p:txBody>
+          <a:bodyPr wrap="square" lIns="0" rIns="0" tIns="0" bIns="0" anchor="t">
+            <a:spAutoFit/>
+          </a:bodyPr>
+          <a:lstStyle/>
+          <a:p>
+            <a:pPr algn="l"/>
+            <a:r>
+              <a:rPr sz="1500" b="1">
+                <a:solidFill>
+                  <a:srgbClr val="1F2A37"/>
+                </a:solidFill>
+                <a:latin typeface="맑은 고딕"/>
+              </a:rPr>
+              <a:t>편집 경계 + 안전 모드</a:t>
+            </a:r>
+          </a:p>
+        </p:txBody>
+      </p:sp>
+      <p:sp>
+        <p:nvSpPr>
+          <p:cNvPr id="13" name="TextBox 12"/>
+          <p:cNvSpPr txBox="1"/>
+          <p:nvPr/>
+        </p:nvSpPr>
+        <p:spPr>
+          <a:xfrm>
+            <a:off x="1188720" y="2606040"/>
+            <a:ext cx="4507992" cy="1188720"/>
+          </a:xfrm>
+          <a:prstGeom prst="rect">
+            <a:avLst/>
+          </a:prstGeom>
+          <a:noFill/>
+        </p:spPr>
+        <p:txBody>
+          <a:bodyPr wrap="square" lIns="0" rIns="0" tIns="0" bIns="0" anchor="t">
+            <a:spAutoFit/>
+          </a:bodyPr>
+          <a:lstStyle/>
+          <a:p>
+            <a:pPr algn="l"/>
+            <a:r>
+              <a:rPr sz="1200" b="0">
+                <a:solidFill>
+                  <a:srgbClr val="1F2A37"/>
+                </a:solidFill>
+                <a:latin typeface="맑은 고딕"/>
+              </a:rPr>
+              <a:t>freeze: 디렉토리 외 Edit/Write 차단</a:t>
+            </a:r>
+          </a:p>
+          <a:p>
+            <a:pPr algn="l"/>
+            <a:r>
+              <a:rPr sz="1200" b="0">
+                <a:solidFill>
+                  <a:srgbClr val="1F2A37"/>
+                </a:solidFill>
+                <a:latin typeface="맑은 고딕"/>
+              </a:rPr>
+              <a:t>unfreeze: 경계 해제</a:t>
+            </a:r>
+          </a:p>
+          <a:p>
+            <a:pPr algn="l"/>
+            <a:r>
+              <a:rPr sz="1200" b="0">
+                <a:solidFill>
+                  <a:srgbClr val="1F2A37"/>
+                </a:solidFill>
+                <a:latin typeface="맑은 고딕"/>
+              </a:rPr>
+              <a:t>guard: freeze + 파괴 명령 차단 통합</a:t>
+            </a:r>
+          </a:p>
+        </p:txBody>
+      </p:sp>
+      <p:sp>
+        <p:nvSpPr>
+          <p:cNvPr id="14" name="Rounded Rectangle 13"/>
+          <p:cNvSpPr/>
+          <p:nvPr/>
+        </p:nvSpPr>
+        <p:spPr>
+          <a:xfrm>
+            <a:off x="6355080" y="1600200"/>
+            <a:ext cx="5056632" cy="2286000"/>
+          </a:xfrm>
+          <a:prstGeom prst="roundRect">
+            <a:avLst>
+              <a:gd name="adj" fmla="val 8000"/>
+            </a:avLst>
+          </a:prstGeom>
+          <a:solidFill>
+            <a:srgbClr val="FFFFFF"/>
+          </a:solidFill>
+          <a:ln w="9525">
+            <a:solidFill>
+              <a:srgbClr val="E5E7EB"/>
+            </a:solidFill>
+          </a:ln>
+          <a:effectLst/>
+        </p:spPr>
+        <p:style>
+          <a:lnRef idx="1">
+            <a:schemeClr val="accent1"/>
+          </a:lnRef>
+          <a:fillRef idx="3">
+            <a:schemeClr val="accent1"/>
+          </a:fillRef>
+          <a:effectRef idx="2">
+            <a:schemeClr val="accent1"/>
+          </a:effectRef>
+          <a:fontRef idx="minor">
+            <a:schemeClr val="lt1"/>
+          </a:fontRef>
+        </p:style>
+        <p:txBody>
+          <a:bodyPr rtlCol="0" anchor="ctr"/>
+          <a:lstStyle/>
+          <a:p>
+            <a:pPr algn="ctr"/>
+          </a:p>
+        </p:txBody>
+      </p:sp>
+      <p:sp>
+        <p:nvSpPr>
+          <p:cNvPr id="15" name="Rectangle 14"/>
+          <p:cNvSpPr/>
+          <p:nvPr/>
+        </p:nvSpPr>
+        <p:spPr>
+          <a:xfrm>
+            <a:off x="6355080" y="1600200"/>
+            <a:ext cx="182880" cy="2286000"/>
+          </a:xfrm>
+          <a:prstGeom prst="rect">
+            <a:avLst/>
+          </a:prstGeom>
+          <a:solidFill>
+            <a:srgbClr val="1F4E79"/>
+          </a:solidFill>
+          <a:ln>
+            <a:noFill/>
+          </a:ln>
+          <a:effectLst/>
+        </p:spPr>
+        <p:style>
+          <a:lnRef idx="1">
+            <a:schemeClr val="accent1"/>
+          </a:lnRef>
+          <a:fillRef idx="3">
+            <a:schemeClr val="accent1"/>
+          </a:fillRef>
+          <a:effectRef idx="2">
+            <a:schemeClr val="accent1"/>
+          </a:effectRef>
+          <a:fontRef idx="minor">
+            <a:schemeClr val="lt1"/>
+          </a:fontRef>
+        </p:style>
+        <p:txBody>
+          <a:bodyPr rtlCol="0" anchor="ctr"/>
+          <a:lstStyle/>
+          <a:p>
+            <a:pPr algn="ctr"/>
+          </a:p>
+        </p:txBody>
+      </p:sp>
+      <p:sp>
+        <p:nvSpPr>
+          <p:cNvPr id="16" name="TextBox 15"/>
+          <p:cNvSpPr txBox="1"/>
+          <p:nvPr/>
+        </p:nvSpPr>
+        <p:spPr>
+          <a:xfrm>
+            <a:off x="6766560" y="1783080"/>
+            <a:ext cx="4507992" cy="365760"/>
+          </a:xfrm>
+          <a:prstGeom prst="rect">
+            <a:avLst/>
+          </a:prstGeom>
+          <a:noFill/>
+        </p:spPr>
+        <p:txBody>
+          <a:bodyPr wrap="square" lIns="0" rIns="0" tIns="0" bIns="0" anchor="t">
+            <a:spAutoFit/>
+          </a:bodyPr>
+          <a:lstStyle/>
+          <a:p>
+            <a:pPr algn="l"/>
+            <a:r>
+              <a:rPr sz="1600" b="1">
+                <a:solidFill>
+                  <a:srgbClr val="1F4E79"/>
+                </a:solidFill>
+                <a:latin typeface="D2Coding, Consolas, Menlo"/>
+              </a:rPr>
+              <a:t>/project:learn</a:t>
+            </a:r>
+          </a:p>
+        </p:txBody>
+      </p:sp>
+      <p:sp>
+        <p:nvSpPr>
+          <p:cNvPr id="17" name="TextBox 16"/>
+          <p:cNvSpPr txBox="1"/>
+          <p:nvPr/>
+        </p:nvSpPr>
+        <p:spPr>
+          <a:xfrm>
+            <a:off x="6766560" y="2194560"/>
+            <a:ext cx="4507992" cy="365760"/>
+          </a:xfrm>
+          <a:prstGeom prst="rect">
+            <a:avLst/>
+          </a:prstGeom>
+          <a:noFill/>
+        </p:spPr>
+        <p:txBody>
+          <a:bodyPr wrap="square" lIns="0" rIns="0" tIns="0" bIns="0" anchor="t">
+            <a:spAutoFit/>
+          </a:bodyPr>
+          <a:lstStyle/>
+          <a:p>
+            <a:pPr algn="l"/>
+            <a:r>
+              <a:rPr sz="1500" b="1">
+                <a:solidFill>
+                  <a:srgbClr val="1F2A37"/>
+                </a:solidFill>
+                <a:latin typeface="맑은 고딕"/>
+              </a:rPr>
+              <a:t>프로젝트 학습 누적</a:t>
+            </a:r>
+          </a:p>
+        </p:txBody>
+      </p:sp>
+      <p:sp>
+        <p:nvSpPr>
+          <p:cNvPr id="18" name="TextBox 17"/>
+          <p:cNvSpPr txBox="1"/>
+          <p:nvPr/>
+        </p:nvSpPr>
+        <p:spPr>
+          <a:xfrm>
+            <a:off x="6766560" y="2606040"/>
+            <a:ext cx="4507992" cy="1188720"/>
+          </a:xfrm>
+          <a:prstGeom prst="rect">
+            <a:avLst/>
+          </a:prstGeom>
+          <a:noFill/>
+        </p:spPr>
+        <p:txBody>
+          <a:bodyPr wrap="square" lIns="0" rIns="0" tIns="0" bIns="0" anchor="t">
+            <a:spAutoFit/>
+          </a:bodyPr>
+          <a:lstStyle/>
+          <a:p>
+            <a:pPr algn="l"/>
+            <a:r>
+              <a:rPr sz="1200" b="0">
+                <a:solidFill>
+                  <a:srgbClr val="1F2A37"/>
+                </a:solidFill>
+                <a:latin typeface="맑은 고딕"/>
+              </a:rPr>
+              <a:t>JSONL append-only + tombstone 삭제</a:t>
+            </a:r>
+          </a:p>
+          <a:p>
+            <a:pPr algn="l"/>
+            <a:r>
+              <a:rPr sz="1200" b="0">
+                <a:solidFill>
+                  <a:srgbClr val="1F2A37"/>
+                </a:solidFill>
+                <a:latin typeface="맑은 고딕"/>
+              </a:rPr>
+              <a:t>show / search / add / prune / stats / export</a:t>
+            </a:r>
+          </a:p>
+          <a:p>
+            <a:pPr algn="l"/>
+            <a:r>
+              <a:rPr sz="1200" b="0">
+                <a:solidFill>
+                  <a:srgbClr val="1F2A37"/>
+                </a:solidFill>
+                <a:latin typeface="맑은 고딕"/>
+              </a:rPr>
+              <a:t>에이전트가 자동 기록 (pitfall·architecture 등)</a:t>
+            </a:r>
+          </a:p>
+        </p:txBody>
+      </p:sp>
+      <p:sp>
+        <p:nvSpPr>
+          <p:cNvPr id="19" name="Rounded Rectangle 18"/>
+          <p:cNvSpPr/>
+          <p:nvPr/>
+        </p:nvSpPr>
+        <p:spPr>
+          <a:xfrm>
+            <a:off x="777240" y="4069080"/>
+            <a:ext cx="5056632" cy="2286000"/>
+          </a:xfrm>
+          <a:prstGeom prst="roundRect">
+            <a:avLst>
+              <a:gd name="adj" fmla="val 8000"/>
+            </a:avLst>
+          </a:prstGeom>
+          <a:solidFill>
+            <a:srgbClr val="FFFFFF"/>
+          </a:solidFill>
+          <a:ln w="9525">
+            <a:solidFill>
+              <a:srgbClr val="E5E7EB"/>
+            </a:solidFill>
+          </a:ln>
+          <a:effectLst/>
+        </p:spPr>
+        <p:style>
+          <a:lnRef idx="1">
+            <a:schemeClr val="accent1"/>
+          </a:lnRef>
+          <a:fillRef idx="3">
+            <a:schemeClr val="accent1"/>
+          </a:fillRef>
+          <a:effectRef idx="2">
+            <a:schemeClr val="accent1"/>
+          </a:effectRef>
+          <a:fontRef idx="minor">
+            <a:schemeClr val="lt1"/>
+          </a:fontRef>
+        </p:style>
+        <p:txBody>
+          <a:bodyPr rtlCol="0" anchor="ctr"/>
+          <a:lstStyle/>
+          <a:p>
+            <a:pPr algn="ctr"/>
+          </a:p>
+        </p:txBody>
+      </p:sp>
+      <p:sp>
+        <p:nvSpPr>
+          <p:cNvPr id="20" name="Rectangle 19"/>
+          <p:cNvSpPr/>
+          <p:nvPr/>
+        </p:nvSpPr>
+        <p:spPr>
+          <a:xfrm>
+            <a:off x="777240" y="4069080"/>
+            <a:ext cx="182880" cy="2286000"/>
+          </a:xfrm>
+          <a:prstGeom prst="rect">
+            <a:avLst/>
+          </a:prstGeom>
+          <a:solidFill>
+            <a:srgbClr val="1F4E79"/>
+          </a:solidFill>
+          <a:ln>
+            <a:noFill/>
+          </a:ln>
+          <a:effectLst/>
+        </p:spPr>
+        <p:style>
+          <a:lnRef idx="1">
+            <a:schemeClr val="accent1"/>
+          </a:lnRef>
+          <a:fillRef idx="3">
+            <a:schemeClr val="accent1"/>
+          </a:fillRef>
+          <a:effectRef idx="2">
+            <a:schemeClr val="accent1"/>
+          </a:effectRef>
+          <a:fontRef idx="minor">
+            <a:schemeClr val="lt1"/>
+          </a:fontRef>
+        </p:style>
+        <p:txBody>
+          <a:bodyPr rtlCol="0" anchor="ctr"/>
+          <a:lstStyle/>
+          <a:p>
+            <a:pPr algn="ctr"/>
+          </a:p>
+        </p:txBody>
+      </p:sp>
+      <p:sp>
+        <p:nvSpPr>
+          <p:cNvPr id="21" name="TextBox 20"/>
+          <p:cNvSpPr txBox="1"/>
+          <p:nvPr/>
+        </p:nvSpPr>
+        <p:spPr>
+          <a:xfrm>
+            <a:off x="1188720" y="4251960"/>
+            <a:ext cx="4507992" cy="365760"/>
+          </a:xfrm>
+          <a:prstGeom prst="rect">
+            <a:avLst/>
+          </a:prstGeom>
+          <a:noFill/>
+        </p:spPr>
+        <p:txBody>
+          <a:bodyPr wrap="square" lIns="0" rIns="0" tIns="0" bIns="0" anchor="t">
+            <a:spAutoFit/>
+          </a:bodyPr>
+          <a:lstStyle/>
+          <a:p>
+            <a:pPr algn="l"/>
+            <a:r>
+              <a:rPr sz="1600" b="1">
+                <a:solidFill>
+                  <a:srgbClr val="1F4E79"/>
+                </a:solidFill>
+                <a:latin typeface="D2Coding, Consolas, Menlo"/>
+              </a:rPr>
+              <a:t>/project:context-save</a:t>
+            </a:r>
+          </a:p>
+        </p:txBody>
+      </p:sp>
+      <p:sp>
+        <p:nvSpPr>
+          <p:cNvPr id="22" name="TextBox 21"/>
+          <p:cNvSpPr txBox="1"/>
+          <p:nvPr/>
+        </p:nvSpPr>
+        <p:spPr>
+          <a:xfrm>
+            <a:off x="1188720" y="4663440"/>
+            <a:ext cx="4507992" cy="365760"/>
+          </a:xfrm>
+          <a:prstGeom prst="rect">
+            <a:avLst/>
+          </a:prstGeom>
+          <a:noFill/>
+        </p:spPr>
+        <p:txBody>
+          <a:bodyPr wrap="square" lIns="0" rIns="0" tIns="0" bIns="0" anchor="t">
+            <a:spAutoFit/>
+          </a:bodyPr>
+          <a:lstStyle/>
+          <a:p>
+            <a:pPr algn="l"/>
+            <a:r>
+              <a:rPr sz="1500" b="1">
+                <a:solidFill>
+                  <a:srgbClr val="1F2A37"/>
+                </a:solidFill>
+                <a:latin typeface="맑은 고딕"/>
+              </a:rPr>
+              <a:t>구조화된 체크포인트</a:t>
+            </a:r>
+          </a:p>
+        </p:txBody>
+      </p:sp>
+      <p:sp>
+        <p:nvSpPr>
+          <p:cNvPr id="23" name="TextBox 22"/>
+          <p:cNvSpPr txBox="1"/>
+          <p:nvPr/>
+        </p:nvSpPr>
+        <p:spPr>
+          <a:xfrm>
+            <a:off x="1188720" y="5074920"/>
+            <a:ext cx="4507992" cy="1188720"/>
+          </a:xfrm>
+          <a:prstGeom prst="rect">
+            <a:avLst/>
+          </a:prstGeom>
+          <a:noFill/>
+        </p:spPr>
+        <p:txBody>
+          <a:bodyPr wrap="square" lIns="0" rIns="0" tIns="0" bIns="0" anchor="t">
+            <a:spAutoFit/>
+          </a:bodyPr>
+          <a:lstStyle/>
+          <a:p>
+            <a:pPr algn="l"/>
+            <a:r>
+              <a:rPr sz="1200" b="0">
+                <a:solidFill>
+                  <a:srgbClr val="1F2A37"/>
+                </a:solidFill>
+                <a:latin typeface="맑은 고딕"/>
+              </a:rPr>
+              <a:t>YAML frontmatter + 4섹션 MD</a:t>
+            </a:r>
+          </a:p>
+          <a:p>
+            <a:pPr algn="l"/>
+            <a:r>
+              <a:rPr sz="1200" b="0">
+                <a:solidFill>
+                  <a:srgbClr val="1F2A37"/>
+                </a:solidFill>
+                <a:latin typeface="맑은 고딕"/>
+              </a:rPr>
+              <a:t>Summary · Decisions · Remaining · Notes</a:t>
+            </a:r>
+          </a:p>
+          <a:p>
+            <a:pPr algn="l"/>
+            <a:r>
+              <a:rPr sz="1200" b="0">
+                <a:solidFill>
+                  <a:srgbClr val="1F2A37"/>
+                </a:solidFill>
+                <a:latin typeface="맑은 고딕"/>
+              </a:rPr>
+              <a:t>파일명 timestamp prefix → 안정 정렬</a:t>
+            </a:r>
+          </a:p>
+        </p:txBody>
+      </p:sp>
+      <p:sp>
+        <p:nvSpPr>
+          <p:cNvPr id="24" name="Rounded Rectangle 23"/>
+          <p:cNvSpPr/>
+          <p:nvPr/>
+        </p:nvSpPr>
+        <p:spPr>
+          <a:xfrm>
+            <a:off x="6355080" y="4069080"/>
+            <a:ext cx="5056632" cy="2286000"/>
+          </a:xfrm>
+          <a:prstGeom prst="roundRect">
+            <a:avLst>
+              <a:gd name="adj" fmla="val 8000"/>
+            </a:avLst>
+          </a:prstGeom>
+          <a:solidFill>
+            <a:srgbClr val="FFFFFF"/>
+          </a:solidFill>
+          <a:ln w="9525">
+            <a:solidFill>
+              <a:srgbClr val="E5E7EB"/>
+            </a:solidFill>
+          </a:ln>
+          <a:effectLst/>
+        </p:spPr>
+        <p:style>
+          <a:lnRef idx="1">
+            <a:schemeClr val="accent1"/>
+          </a:lnRef>
+          <a:fillRef idx="3">
+            <a:schemeClr val="accent1"/>
+          </a:fillRef>
+          <a:effectRef idx="2">
+            <a:schemeClr val="accent1"/>
+          </a:effectRef>
+          <a:fontRef idx="minor">
+            <a:schemeClr val="lt1"/>
+          </a:fontRef>
+        </p:style>
+        <p:txBody>
+          <a:bodyPr rtlCol="0" anchor="ctr"/>
+          <a:lstStyle/>
+          <a:p>
+            <a:pPr algn="ctr"/>
+          </a:p>
+        </p:txBody>
+      </p:sp>
+      <p:sp>
+        <p:nvSpPr>
+          <p:cNvPr id="25" name="Rectangle 24"/>
+          <p:cNvSpPr/>
+          <p:nvPr/>
+        </p:nvSpPr>
+        <p:spPr>
+          <a:xfrm>
+            <a:off x="6355080" y="4069080"/>
+            <a:ext cx="182880" cy="2286000"/>
+          </a:xfrm>
+          <a:prstGeom prst="rect">
+            <a:avLst/>
+          </a:prstGeom>
+          <a:solidFill>
+            <a:srgbClr val="1F4E79"/>
+          </a:solidFill>
+          <a:ln>
+            <a:noFill/>
+          </a:ln>
+          <a:effectLst/>
+        </p:spPr>
+        <p:style>
+          <a:lnRef idx="1">
+            <a:schemeClr val="accent1"/>
+          </a:lnRef>
+          <a:fillRef idx="3">
+            <a:schemeClr val="accent1"/>
+          </a:fillRef>
+          <a:effectRef idx="2">
+            <a:schemeClr val="accent1"/>
+          </a:effectRef>
+          <a:fontRef idx="minor">
+            <a:schemeClr val="lt1"/>
+          </a:fontRef>
+        </p:style>
+        <p:txBody>
+          <a:bodyPr rtlCol="0" anchor="ctr"/>
+          <a:lstStyle/>
+          <a:p>
+            <a:pPr algn="ctr"/>
+          </a:p>
+        </p:txBody>
+      </p:sp>
+      <p:sp>
+        <p:nvSpPr>
+          <p:cNvPr id="26" name="TextBox 25"/>
+          <p:cNvSpPr txBox="1"/>
+          <p:nvPr/>
+        </p:nvSpPr>
+        <p:spPr>
+          <a:xfrm>
+            <a:off x="6766560" y="4251960"/>
+            <a:ext cx="4507992" cy="365760"/>
+          </a:xfrm>
+          <a:prstGeom prst="rect">
+            <a:avLst/>
+          </a:prstGeom>
+          <a:noFill/>
+        </p:spPr>
+        <p:txBody>
+          <a:bodyPr wrap="square" lIns="0" rIns="0" tIns="0" bIns="0" anchor="t">
+            <a:spAutoFit/>
+          </a:bodyPr>
+          <a:lstStyle/>
+          <a:p>
+            <a:pPr algn="l"/>
+            <a:r>
+              <a:rPr sz="1600" b="1">
+                <a:solidFill>
+                  <a:srgbClr val="1F4E79"/>
+                </a:solidFill>
+                <a:latin typeface="D2Coding, Consolas, Menlo"/>
+              </a:rPr>
+              <a:t>/project:context-restore</a:t>
+            </a:r>
+          </a:p>
+        </p:txBody>
+      </p:sp>
+      <p:sp>
+        <p:nvSpPr>
+          <p:cNvPr id="27" name="TextBox 26"/>
+          <p:cNvSpPr txBox="1"/>
+          <p:nvPr/>
+        </p:nvSpPr>
+        <p:spPr>
+          <a:xfrm>
+            <a:off x="6766560" y="4663440"/>
+            <a:ext cx="4507992" cy="365760"/>
+          </a:xfrm>
+          <a:prstGeom prst="rect">
+            <a:avLst/>
+          </a:prstGeom>
+          <a:noFill/>
+        </p:spPr>
+        <p:txBody>
+          <a:bodyPr wrap="square" lIns="0" rIns="0" tIns="0" bIns="0" anchor="t">
+            <a:spAutoFit/>
+          </a:bodyPr>
+          <a:lstStyle/>
+          <a:p>
+            <a:pPr algn="l"/>
+            <a:r>
+              <a:rPr sz="1500" b="1">
+                <a:solidFill>
+                  <a:srgbClr val="1F2A37"/>
+                </a:solidFill>
+                <a:latin typeface="맑은 고딕"/>
+              </a:rPr>
+              <a:t>체크포인트 복원</a:t>
+            </a:r>
+          </a:p>
+        </p:txBody>
+      </p:sp>
+      <p:sp>
+        <p:nvSpPr>
+          <p:cNvPr id="28" name="TextBox 27"/>
+          <p:cNvSpPr txBox="1"/>
+          <p:nvPr/>
+        </p:nvSpPr>
+        <p:spPr>
+          <a:xfrm>
+            <a:off x="6766560" y="5074920"/>
+            <a:ext cx="4507992" cy="1188720"/>
+          </a:xfrm>
+          <a:prstGeom prst="rect">
+            <a:avLst/>
+          </a:prstGeom>
+          <a:noFill/>
+        </p:spPr>
+        <p:txBody>
+          <a:bodyPr wrap="square" lIns="0" rIns="0" tIns="0" bIns="0" anchor="t">
+            <a:spAutoFit/>
+          </a:bodyPr>
+          <a:lstStyle/>
+          <a:p>
+            <a:pPr algn="l"/>
+            <a:r>
+              <a:rPr sz="1200" b="0">
+                <a:solidFill>
+                  <a:srgbClr val="1F2A37"/>
+                </a:solidFill>
+                <a:latin typeface="맑은 고딕"/>
+              </a:rPr>
+              <a:t>모든 브랜치 대상 가장 최근 로드</a:t>
+            </a:r>
+          </a:p>
+          <a:p>
+            <a:pPr algn="l"/>
+            <a:r>
+              <a:rPr sz="1200" b="0">
+                <a:solidFill>
+                  <a:srgbClr val="1F2A37"/>
+                </a:solidFill>
+                <a:latin typeface="맑은 고딕"/>
+              </a:rPr>
+              <a:t>cross-branch resume (worktree 대응)</a:t>
+            </a:r>
+          </a:p>
+          <a:p>
+            <a:pPr algn="l"/>
+            <a:r>
+              <a:rPr sz="1200" b="0">
+                <a:solidFill>
+                  <a:srgbClr val="1F2A37"/>
+                </a:solidFill>
+                <a:latin typeface="맑은 고딕"/>
+              </a:rPr>
+              <a:t>frontmatter + 4섹션 자동 요약 출력</a:t>
+            </a:r>
+          </a:p>
+        </p:txBody>
+      </p:sp>
+    </p:spTree>
+  </p:cSld>
+  <p:clrMapOvr>
+    <a:masterClrMapping/>
+  </p:clrMapOvr>
+</p:sld>
+</file>
+
+<file path=ppt/slides/slide16.xml><?xml version="1.0" encoding="utf-8"?>
+<p:sld xmlns:a="http://schemas.openxmlformats.org/drawingml/2006/main" xmlns:p="http://schemas.openxmlformats.org/presentationml/2006/main" xmlns:r="http://schemas.openxmlformats.org/officeDocument/2006/relationships">
+  <p:cSld>
+    <p:spTree>
+      <p:nvGrpSpPr>
+        <p:cNvPr id="1" name=""/>
+        <p:cNvGrpSpPr/>
+        <p:nvPr/>
+      </p:nvGrpSpPr>
+      <p:grpSpPr/>
+      <p:sp>
+        <p:nvSpPr>
+          <p:cNvPr id="2" name="Rectangle 1"/>
+          <p:cNvSpPr/>
+          <p:nvPr/>
+        </p:nvSpPr>
+        <p:spPr>
+          <a:xfrm>
+            <a:off x="0" y="0"/>
+            <a:ext cx="12191695" cy="6858000"/>
+          </a:xfrm>
+          <a:prstGeom prst="rect">
+            <a:avLst/>
+          </a:prstGeom>
+          <a:solidFill>
+            <a:srgbClr val="FFFFFF"/>
+          </a:solidFill>
+          <a:ln>
+            <a:noFill/>
+          </a:ln>
+          <a:effectLst/>
+        </p:spPr>
+        <p:style>
+          <a:lnRef idx="1">
+            <a:schemeClr val="accent1"/>
+          </a:lnRef>
+          <a:fillRef idx="3">
+            <a:schemeClr val="accent1"/>
+          </a:fillRef>
+          <a:effectRef idx="2">
+            <a:schemeClr val="accent1"/>
+          </a:effectRef>
+          <a:fontRef idx="minor">
+            <a:schemeClr val="lt1"/>
+          </a:fontRef>
+        </p:style>
+        <p:txBody>
+          <a:bodyPr rtlCol="0" anchor="ctr"/>
+          <a:lstStyle/>
+          <a:p>
+            <a:pPr algn="ctr"/>
+          </a:p>
+        </p:txBody>
+      </p:sp>
+      <p:sp>
+        <p:nvSpPr>
+          <p:cNvPr id="3" name="Rectangle 2"/>
+          <p:cNvSpPr/>
+          <p:nvPr/>
+        </p:nvSpPr>
+        <p:spPr>
+          <a:xfrm>
+            <a:off x="548640" y="502920"/>
+            <a:ext cx="109728" cy="438912"/>
+          </a:xfrm>
+          <a:prstGeom prst="rect">
+            <a:avLst/>
+          </a:prstGeom>
+          <a:solidFill>
+            <a:srgbClr val="1F4E79"/>
+          </a:solidFill>
+          <a:ln>
+            <a:noFill/>
+          </a:ln>
+          <a:effectLst/>
+        </p:spPr>
+        <p:style>
+          <a:lnRef idx="1">
+            <a:schemeClr val="accent1"/>
+          </a:lnRef>
+          <a:fillRef idx="3">
+            <a:schemeClr val="accent1"/>
+          </a:fillRef>
+          <a:effectRef idx="2">
+            <a:schemeClr val="accent1"/>
+          </a:effectRef>
+          <a:fontRef idx="minor">
+            <a:schemeClr val="lt1"/>
+          </a:fontRef>
+        </p:style>
+        <p:txBody>
+          <a:bodyPr rtlCol="0" anchor="ctr"/>
+          <a:lstStyle/>
+          <a:p>
+            <a:pPr algn="ctr"/>
+          </a:p>
+        </p:txBody>
+      </p:sp>
+      <p:sp>
+        <p:nvSpPr>
+          <p:cNvPr id="4" name="TextBox 3"/>
+          <p:cNvSpPr txBox="1"/>
+          <p:nvPr/>
+        </p:nvSpPr>
+        <p:spPr>
+          <a:xfrm>
+            <a:off x="777240" y="457200"/>
+            <a:ext cx="9144000" cy="274320"/>
+          </a:xfrm>
+          <a:prstGeom prst="rect">
+            <a:avLst/>
+          </a:prstGeom>
+          <a:noFill/>
+        </p:spPr>
+        <p:txBody>
+          <a:bodyPr wrap="square" lIns="0" rIns="0" tIns="0" bIns="0" anchor="t">
+            <a:spAutoFit/>
+          </a:bodyPr>
+          <a:lstStyle/>
+          <a:p>
+            <a:pPr algn="l"/>
+            <a:r>
+              <a:rPr sz="1100" b="1">
+                <a:solidFill>
+                  <a:srgbClr val="1F4E79"/>
+                </a:solidFill>
+                <a:latin typeface="맑은 고딕"/>
+              </a:rPr>
+              <a:t>PHASE 2 UPGRADE · Autoplan / Ship / Retro</a:t>
+            </a:r>
+          </a:p>
+        </p:txBody>
+      </p:sp>
+      <p:sp>
+        <p:nvSpPr>
+          <p:cNvPr id="5" name="TextBox 4"/>
+          <p:cNvSpPr txBox="1"/>
+          <p:nvPr/>
+        </p:nvSpPr>
+        <p:spPr>
+          <a:xfrm>
+            <a:off x="777240" y="685800"/>
+            <a:ext cx="10515600" cy="502920"/>
+          </a:xfrm>
+          <a:prstGeom prst="rect">
+            <a:avLst/>
+          </a:prstGeom>
+          <a:noFill/>
+        </p:spPr>
+        <p:txBody>
+          <a:bodyPr wrap="square" lIns="0" rIns="0" tIns="0" bIns="0" anchor="t">
+            <a:spAutoFit/>
+          </a:bodyPr>
+          <a:lstStyle/>
+          <a:p>
+            <a:pPr algn="l"/>
+            <a:r>
+              <a:rPr sz="2600" b="1">
+                <a:solidFill>
+                  <a:srgbClr val="1F2A37"/>
+                </a:solidFill>
+                <a:latin typeface="맑은 고딕"/>
+              </a:rPr>
+              <a:t>자동화 파이프라인 + 회고</a:t>
+            </a:r>
+          </a:p>
+        </p:txBody>
+      </p:sp>
+      <p:sp>
+        <p:nvSpPr>
+          <p:cNvPr id="6" name="Rectangle 5"/>
+          <p:cNvSpPr/>
+          <p:nvPr/>
+        </p:nvSpPr>
+        <p:spPr>
+          <a:xfrm>
+            <a:off x="548640" y="1298448"/>
+            <a:ext cx="11091672" cy="9525"/>
+          </a:xfrm>
+          <a:prstGeom prst="rect">
+            <a:avLst/>
+          </a:prstGeom>
+          <a:solidFill>
+            <a:srgbClr val="E5E7EB"/>
+          </a:solidFill>
+          <a:ln>
+            <a:noFill/>
+          </a:ln>
+          <a:effectLst/>
+        </p:spPr>
+        <p:style>
+          <a:lnRef idx="1">
+            <a:schemeClr val="accent1"/>
+          </a:lnRef>
+          <a:fillRef idx="3">
+            <a:schemeClr val="accent1"/>
+          </a:fillRef>
+          <a:effectRef idx="2">
+            <a:schemeClr val="accent1"/>
+          </a:effectRef>
+          <a:fontRef idx="minor">
+            <a:schemeClr val="lt1"/>
+          </a:fontRef>
+        </p:style>
+        <p:txBody>
+          <a:bodyPr rtlCol="0" anchor="ctr"/>
+          <a:lstStyle/>
+          <a:p>
+            <a:pPr algn="ctr"/>
+          </a:p>
+        </p:txBody>
+      </p:sp>
+      <p:sp>
+        <p:nvSpPr>
+          <p:cNvPr id="7" name="TextBox 6"/>
+          <p:cNvSpPr txBox="1"/>
+          <p:nvPr/>
+        </p:nvSpPr>
+        <p:spPr>
+          <a:xfrm>
+            <a:off x="10972800" y="6446520"/>
+            <a:ext cx="1097280" cy="274320"/>
+          </a:xfrm>
+          <a:prstGeom prst="rect">
+            <a:avLst/>
+          </a:prstGeom>
+          <a:noFill/>
+        </p:spPr>
+        <p:txBody>
+          <a:bodyPr wrap="square" lIns="0" rIns="0" tIns="0" bIns="0" anchor="t">
+            <a:spAutoFit/>
+          </a:bodyPr>
+          <a:lstStyle/>
+          <a:p>
+            <a:pPr algn="r"/>
+            <a:r>
+              <a:rPr sz="1000" b="0">
+                <a:solidFill>
+                  <a:srgbClr val="6B7280"/>
+                </a:solidFill>
+                <a:latin typeface="맑은 고딕"/>
+              </a:rPr>
+              <a:t>10 / 17</a:t>
+            </a:r>
+          </a:p>
+        </p:txBody>
+      </p:sp>
+      <p:sp>
+        <p:nvSpPr>
+          <p:cNvPr id="8" name="TextBox 7"/>
+          <p:cNvSpPr txBox="1"/>
+          <p:nvPr/>
+        </p:nvSpPr>
+        <p:spPr>
+          <a:xfrm>
+            <a:off x="548640" y="6446520"/>
+            <a:ext cx="5486400" cy="274320"/>
+          </a:xfrm>
+          <a:prstGeom prst="rect">
+            <a:avLst/>
+          </a:prstGeom>
+          <a:noFill/>
+        </p:spPr>
+        <p:txBody>
+          <a:bodyPr wrap="square" lIns="0" rIns="0" tIns="0" bIns="0" anchor="t">
+            <a:spAutoFit/>
+          </a:bodyPr>
+          <a:lstStyle/>
+          <a:p>
+            <a:pPr algn="l"/>
+            <a:r>
+              <a:rPr sz="1000" b="0">
+                <a:solidFill>
+                  <a:srgbClr val="6B7280"/>
+                </a:solidFill>
+                <a:latin typeface="맑은 고딕"/>
+              </a:rPr>
+              <a:t>하네스 엔지니어링 템플릿 — harness-template</a:t>
+            </a:r>
+          </a:p>
+        </p:txBody>
+      </p:sp>
+      <p:sp>
+        <p:nvSpPr>
+          <p:cNvPr id="9" name="Rounded Rectangle 8"/>
+          <p:cNvSpPr/>
+          <p:nvPr/>
+        </p:nvSpPr>
+        <p:spPr>
+          <a:xfrm>
+            <a:off x="777240" y="1600200"/>
+            <a:ext cx="5056632" cy="2286000"/>
+          </a:xfrm>
+          <a:prstGeom prst="roundRect">
+            <a:avLst>
+              <a:gd name="adj" fmla="val 8000"/>
+            </a:avLst>
+          </a:prstGeom>
+          <a:solidFill>
+            <a:srgbClr val="FFFFFF"/>
+          </a:solidFill>
+          <a:ln w="9525">
+            <a:solidFill>
+              <a:srgbClr val="E5E7EB"/>
+            </a:solidFill>
+          </a:ln>
+          <a:effectLst/>
+        </p:spPr>
+        <p:style>
+          <a:lnRef idx="1">
+            <a:schemeClr val="accent1"/>
+          </a:lnRef>
+          <a:fillRef idx="3">
+            <a:schemeClr val="accent1"/>
+          </a:fillRef>
+          <a:effectRef idx="2">
+            <a:schemeClr val="accent1"/>
+          </a:effectRef>
+          <a:fontRef idx="minor">
+            <a:schemeClr val="lt1"/>
+          </a:fontRef>
+        </p:style>
+        <p:txBody>
+          <a:bodyPr rtlCol="0" anchor="ctr"/>
+          <a:lstStyle/>
+          <a:p>
+            <a:pPr algn="ctr"/>
+          </a:p>
+        </p:txBody>
+      </p:sp>
+      <p:sp>
+        <p:nvSpPr>
+          <p:cNvPr id="10" name="Rectangle 9"/>
+          <p:cNvSpPr/>
+          <p:nvPr/>
+        </p:nvSpPr>
+        <p:spPr>
+          <a:xfrm>
+            <a:off x="777240" y="1600200"/>
+            <a:ext cx="182880" cy="2286000"/>
+          </a:xfrm>
+          <a:prstGeom prst="rect">
+            <a:avLst/>
+          </a:prstGeom>
+          <a:solidFill>
+            <a:srgbClr val="1F4E79"/>
+          </a:solidFill>
+          <a:ln>
+            <a:noFill/>
+          </a:ln>
+          <a:effectLst/>
+        </p:spPr>
+        <p:style>
+          <a:lnRef idx="1">
+            <a:schemeClr val="accent1"/>
+          </a:lnRef>
+          <a:fillRef idx="3">
+            <a:schemeClr val="accent1"/>
+          </a:fillRef>
+          <a:effectRef idx="2">
+            <a:schemeClr val="accent1"/>
+          </a:effectRef>
+          <a:fontRef idx="minor">
+            <a:schemeClr val="lt1"/>
+          </a:fontRef>
+        </p:style>
+        <p:txBody>
+          <a:bodyPr rtlCol="0" anchor="ctr"/>
+          <a:lstStyle/>
+          <a:p>
+            <a:pPr algn="ctr"/>
+          </a:p>
+        </p:txBody>
+      </p:sp>
+      <p:sp>
+        <p:nvSpPr>
+          <p:cNvPr id="11" name="TextBox 10"/>
+          <p:cNvSpPr txBox="1"/>
+          <p:nvPr/>
+        </p:nvSpPr>
+        <p:spPr>
+          <a:xfrm>
+            <a:off x="1188720" y="1783080"/>
+            <a:ext cx="4507992" cy="365760"/>
+          </a:xfrm>
+          <a:prstGeom prst="rect">
+            <a:avLst/>
+          </a:prstGeom>
+          <a:noFill/>
+        </p:spPr>
+        <p:txBody>
+          <a:bodyPr wrap="square" lIns="0" rIns="0" tIns="0" bIns="0" anchor="t">
+            <a:spAutoFit/>
+          </a:bodyPr>
+          <a:lstStyle/>
+          <a:p>
+            <a:pPr algn="l"/>
+            <a:r>
+              <a:rPr sz="1600" b="1">
+                <a:solidFill>
+                  <a:srgbClr val="1F4E79"/>
+                </a:solidFill>
+                <a:latin typeface="D2Coding, Consolas, Menlo"/>
+              </a:rPr>
+              <a:t>/project:plan-full &lt;요구사항&gt;</a:t>
+            </a:r>
+          </a:p>
+        </p:txBody>
+      </p:sp>
+      <p:sp>
+        <p:nvSpPr>
+          <p:cNvPr id="12" name="TextBox 11"/>
+          <p:cNvSpPr txBox="1"/>
+          <p:nvPr/>
+        </p:nvSpPr>
+        <p:spPr>
+          <a:xfrm>
+            <a:off x="1188720" y="2194560"/>
+            <a:ext cx="4507992" cy="365760"/>
+          </a:xfrm>
+          <a:prstGeom prst="rect">
+            <a:avLst/>
+          </a:prstGeom>
+          <a:noFill/>
+        </p:spPr>
+        <p:txBody>
+          <a:bodyPr wrap="square" lIns="0" rIns="0" tIns="0" bIns="0" anchor="t">
+            <a:spAutoFit/>
+          </a:bodyPr>
+          <a:lstStyle/>
+          <a:p>
+            <a:pPr algn="l"/>
+            <a:r>
+              <a:rPr sz="1500" b="1">
+                <a:solidFill>
+                  <a:srgbClr val="1F2A37"/>
+                </a:solidFill>
+                <a:latin typeface="맑은 고딕"/>
+              </a:rPr>
+              <a:t>Autoplan 파이프라인</a:t>
+            </a:r>
+          </a:p>
+        </p:txBody>
+      </p:sp>
+      <p:sp>
+        <p:nvSpPr>
+          <p:cNvPr id="13" name="TextBox 12"/>
+          <p:cNvSpPr txBox="1"/>
+          <p:nvPr/>
+        </p:nvSpPr>
+        <p:spPr>
+          <a:xfrm>
+            <a:off x="1188720" y="2606040"/>
+            <a:ext cx="4507992" cy="1188720"/>
+          </a:xfrm>
+          <a:prstGeom prst="rect">
+            <a:avLst/>
+          </a:prstGeom>
+          <a:noFill/>
+        </p:spPr>
+        <p:txBody>
+          <a:bodyPr wrap="square" lIns="0" rIns="0" tIns="0" bIns="0" anchor="t">
+            <a:spAutoFit/>
+          </a:bodyPr>
+          <a:lstStyle/>
+          <a:p>
+            <a:pPr algn="l"/>
+            <a:r>
+              <a:rPr sz="1200" b="0">
+                <a:solidFill>
+                  <a:srgbClr val="1F2A37"/>
+                </a:solidFill>
+                <a:latin typeface="맑은 고딕"/>
+              </a:rPr>
+              <a:t>Planner → Architect → Reviewer 체인</a:t>
+            </a:r>
+          </a:p>
+          <a:p>
+            <a:pPr algn="l"/>
+            <a:r>
+              <a:rPr sz="1200" b="0">
+                <a:solidFill>
+                  <a:srgbClr val="1F2A37"/>
+                </a:solidFill>
+                <a:latin typeface="맑은 고딕"/>
+              </a:rPr>
+              <a:t>'설계 필요' 판정: DB·API·보안·3+ 파일</a:t>
+            </a:r>
+          </a:p>
+          <a:p>
+            <a:pPr algn="l"/>
+            <a:r>
+              <a:rPr sz="1200" b="0">
+                <a:solidFill>
+                  <a:srgbClr val="1F2A37"/>
+                </a:solidFill>
+                <a:latin typeface="맑은 고딕"/>
+              </a:rPr>
+              <a:t>관련 learnings 사전 조회 → ADR 자동 작성</a:t>
+            </a:r>
+          </a:p>
+        </p:txBody>
+      </p:sp>
+      <p:sp>
+        <p:nvSpPr>
+          <p:cNvPr id="14" name="Rounded Rectangle 13"/>
+          <p:cNvSpPr/>
+          <p:nvPr/>
+        </p:nvSpPr>
+        <p:spPr>
+          <a:xfrm>
+            <a:off x="6355080" y="1600200"/>
+            <a:ext cx="5056632" cy="2286000"/>
+          </a:xfrm>
+          <a:prstGeom prst="roundRect">
+            <a:avLst>
+              <a:gd name="adj" fmla="val 8000"/>
+            </a:avLst>
+          </a:prstGeom>
+          <a:solidFill>
+            <a:srgbClr val="FFFFFF"/>
+          </a:solidFill>
+          <a:ln w="9525">
+            <a:solidFill>
+              <a:srgbClr val="E5E7EB"/>
+            </a:solidFill>
+          </a:ln>
+          <a:effectLst/>
+        </p:spPr>
+        <p:style>
+          <a:lnRef idx="1">
+            <a:schemeClr val="accent1"/>
+          </a:lnRef>
+          <a:fillRef idx="3">
+            <a:schemeClr val="accent1"/>
+          </a:fillRef>
+          <a:effectRef idx="2">
+            <a:schemeClr val="accent1"/>
+          </a:effectRef>
+          <a:fontRef idx="minor">
+            <a:schemeClr val="lt1"/>
+          </a:fontRef>
+        </p:style>
+        <p:txBody>
+          <a:bodyPr rtlCol="0" anchor="ctr"/>
+          <a:lstStyle/>
+          <a:p>
+            <a:pPr algn="ctr"/>
+          </a:p>
+        </p:txBody>
+      </p:sp>
+      <p:sp>
+        <p:nvSpPr>
+          <p:cNvPr id="15" name="Rectangle 14"/>
+          <p:cNvSpPr/>
+          <p:nvPr/>
+        </p:nvSpPr>
+        <p:spPr>
+          <a:xfrm>
+            <a:off x="6355080" y="1600200"/>
+            <a:ext cx="182880" cy="2286000"/>
+          </a:xfrm>
+          <a:prstGeom prst="rect">
+            <a:avLst/>
+          </a:prstGeom>
+          <a:solidFill>
+            <a:srgbClr val="1F4E79"/>
+          </a:solidFill>
+          <a:ln>
+            <a:noFill/>
+          </a:ln>
+          <a:effectLst/>
+        </p:spPr>
+        <p:style>
+          <a:lnRef idx="1">
+            <a:schemeClr val="accent1"/>
+          </a:lnRef>
+          <a:fillRef idx="3">
+            <a:schemeClr val="accent1"/>
+          </a:fillRef>
+          <a:effectRef idx="2">
+            <a:schemeClr val="accent1"/>
+          </a:effectRef>
+          <a:fontRef idx="minor">
+            <a:schemeClr val="lt1"/>
+          </a:fontRef>
+        </p:style>
+        <p:txBody>
+          <a:bodyPr rtlCol="0" anchor="ctr"/>
+          <a:lstStyle/>
+          <a:p>
+            <a:pPr algn="ctr"/>
+          </a:p>
+        </p:txBody>
+      </p:sp>
+      <p:sp>
+        <p:nvSpPr>
+          <p:cNvPr id="16" name="TextBox 15"/>
+          <p:cNvSpPr txBox="1"/>
+          <p:nvPr/>
+        </p:nvSpPr>
+        <p:spPr>
+          <a:xfrm>
+            <a:off x="6766560" y="1783080"/>
+            <a:ext cx="4507992" cy="365760"/>
+          </a:xfrm>
+          <a:prstGeom prst="rect">
+            <a:avLst/>
+          </a:prstGeom>
+          <a:noFill/>
+        </p:spPr>
+        <p:txBody>
+          <a:bodyPr wrap="square" lIns="0" rIns="0" tIns="0" bIns="0" anchor="t">
+            <a:spAutoFit/>
+          </a:bodyPr>
+          <a:lstStyle/>
+          <a:p>
+            <a:pPr algn="l"/>
+            <a:r>
+              <a:rPr sz="1600" b="1">
+                <a:solidFill>
+                  <a:srgbClr val="1F4E79"/>
+                </a:solidFill>
+                <a:latin typeface="D2Coding, Consolas, Menlo"/>
+              </a:rPr>
+              <a:t>/project:ship</a:t>
+            </a:r>
+          </a:p>
+        </p:txBody>
+      </p:sp>
+      <p:sp>
+        <p:nvSpPr>
+          <p:cNvPr id="17" name="TextBox 16"/>
+          <p:cNvSpPr txBox="1"/>
+          <p:nvPr/>
+        </p:nvSpPr>
+        <p:spPr>
+          <a:xfrm>
+            <a:off x="6766560" y="2194560"/>
+            <a:ext cx="4507992" cy="365760"/>
+          </a:xfrm>
+          <a:prstGeom prst="rect">
+            <a:avLst/>
+          </a:prstGeom>
+          <a:noFill/>
+        </p:spPr>
+        <p:txBody>
+          <a:bodyPr wrap="square" lIns="0" rIns="0" tIns="0" bIns="0" anchor="t">
+            <a:spAutoFit/>
+          </a:bodyPr>
+          <a:lstStyle/>
+          <a:p>
+            <a:pPr algn="l"/>
+            <a:r>
+              <a:rPr sz="1500" b="1">
+                <a:solidFill>
+                  <a:srgbClr val="1F2A37"/>
+                </a:solidFill>
+                <a:latin typeface="맑은 고딕"/>
+              </a:rPr>
+              <a:t>배포 전 리뷰 준비도</a:t>
+            </a:r>
+          </a:p>
+        </p:txBody>
+      </p:sp>
+      <p:sp>
+        <p:nvSpPr>
+          <p:cNvPr id="18" name="TextBox 17"/>
+          <p:cNvSpPr txBox="1"/>
+          <p:nvPr/>
+        </p:nvSpPr>
+        <p:spPr>
+          <a:xfrm>
+            <a:off x="6766560" y="2606040"/>
+            <a:ext cx="4507992" cy="1188720"/>
+          </a:xfrm>
+          <a:prstGeom prst="rect">
+            <a:avLst/>
+          </a:prstGeom>
+          <a:noFill/>
+        </p:spPr>
+        <p:txBody>
+          <a:bodyPr wrap="square" lIns="0" rIns="0" tIns="0" bIns="0" anchor="t">
+            <a:spAutoFit/>
+          </a:bodyPr>
+          <a:lstStyle/>
+          <a:p>
+            <a:pPr algn="l"/>
+            <a:r>
+              <a:rPr sz="1200" b="0">
+                <a:solidFill>
+                  <a:srgbClr val="1F2A37"/>
+                </a:solidFill>
+                <a:latin typeface="맑은 고딕"/>
+              </a:rPr>
+              <a:t>git diff 정규식 분류 (8 카테고리)</a:t>
+            </a:r>
+          </a:p>
+          <a:p>
+            <a:pPr algn="l"/>
+            <a:r>
+              <a:rPr sz="1200" b="0">
+                <a:solidFill>
+                  <a:srgbClr val="1F2A37"/>
+                </a:solidFill>
+                <a:latin typeface="맑은 고딕"/>
+              </a:rPr>
+              <a:t>UI·SECURITY·DB·API·INFRA 기반</a:t>
+            </a:r>
+          </a:p>
+          <a:p>
+            <a:pPr algn="l"/>
+            <a:r>
+              <a:rPr sz="1200" b="0">
+                <a:solidFill>
+                  <a:srgbClr val="1F2A37"/>
+                </a:solidFill>
+                <a:latin typeface="맑은 고딕"/>
+              </a:rPr>
+              <a:t>필요한 리뷰만 추천 (untracked 포함)</a:t>
+            </a:r>
+          </a:p>
+        </p:txBody>
+      </p:sp>
+      <p:sp>
+        <p:nvSpPr>
+          <p:cNvPr id="19" name="Rounded Rectangle 18"/>
+          <p:cNvSpPr/>
+          <p:nvPr/>
+        </p:nvSpPr>
+        <p:spPr>
+          <a:xfrm>
+            <a:off x="777240" y="4069080"/>
+            <a:ext cx="5056632" cy="2286000"/>
+          </a:xfrm>
+          <a:prstGeom prst="roundRect">
+            <a:avLst>
+              <a:gd name="adj" fmla="val 8000"/>
+            </a:avLst>
+          </a:prstGeom>
+          <a:solidFill>
+            <a:srgbClr val="FFFFFF"/>
+          </a:solidFill>
+          <a:ln w="9525">
+            <a:solidFill>
+              <a:srgbClr val="E5E7EB"/>
+            </a:solidFill>
+          </a:ln>
+          <a:effectLst/>
+        </p:spPr>
+        <p:style>
+          <a:lnRef idx="1">
+            <a:schemeClr val="accent1"/>
+          </a:lnRef>
+          <a:fillRef idx="3">
+            <a:schemeClr val="accent1"/>
+          </a:fillRef>
+          <a:effectRef idx="2">
+            <a:schemeClr val="accent1"/>
+          </a:effectRef>
+          <a:fontRef idx="minor">
+            <a:schemeClr val="lt1"/>
+          </a:fontRef>
+        </p:style>
+        <p:txBody>
+          <a:bodyPr rtlCol="0" anchor="ctr"/>
+          <a:lstStyle/>
+          <a:p>
+            <a:pPr algn="ctr"/>
+          </a:p>
+        </p:txBody>
+      </p:sp>
+      <p:sp>
+        <p:nvSpPr>
+          <p:cNvPr id="20" name="Rectangle 19"/>
+          <p:cNvSpPr/>
+          <p:nvPr/>
+        </p:nvSpPr>
+        <p:spPr>
+          <a:xfrm>
+            <a:off x="777240" y="4069080"/>
+            <a:ext cx="182880" cy="2286000"/>
+          </a:xfrm>
+          <a:prstGeom prst="rect">
+            <a:avLst/>
+          </a:prstGeom>
+          <a:solidFill>
+            <a:srgbClr val="1F4E79"/>
+          </a:solidFill>
+          <a:ln>
+            <a:noFill/>
+          </a:ln>
+          <a:effectLst/>
+        </p:spPr>
+        <p:style>
+          <a:lnRef idx="1">
+            <a:schemeClr val="accent1"/>
+          </a:lnRef>
+          <a:fillRef idx="3">
+            <a:schemeClr val="accent1"/>
+          </a:fillRef>
+          <a:effectRef idx="2">
+            <a:schemeClr val="accent1"/>
+          </a:effectRef>
+          <a:fontRef idx="minor">
+            <a:schemeClr val="lt1"/>
+          </a:fontRef>
+        </p:style>
+        <p:txBody>
+          <a:bodyPr rtlCol="0" anchor="ctr"/>
+          <a:lstStyle/>
+          <a:p>
+            <a:pPr algn="ctr"/>
+          </a:p>
+        </p:txBody>
+      </p:sp>
+      <p:sp>
+        <p:nvSpPr>
+          <p:cNvPr id="21" name="TextBox 20"/>
+          <p:cNvSpPr txBox="1"/>
+          <p:nvPr/>
+        </p:nvSpPr>
+        <p:spPr>
+          <a:xfrm>
+            <a:off x="1188720" y="4251960"/>
+            <a:ext cx="4507992" cy="365760"/>
+          </a:xfrm>
+          <a:prstGeom prst="rect">
+            <a:avLst/>
+          </a:prstGeom>
+          <a:noFill/>
+        </p:spPr>
+        <p:txBody>
+          <a:bodyPr wrap="square" lIns="0" rIns="0" tIns="0" bIns="0" anchor="t">
+            <a:spAutoFit/>
+          </a:bodyPr>
+          <a:lstStyle/>
+          <a:p>
+            <a:pPr algn="l"/>
+            <a:r>
+              <a:rPr sz="1600" b="1">
+                <a:solidFill>
+                  <a:srgbClr val="1F4E79"/>
+                </a:solidFill>
+                <a:latin typeface="D2Coding, Consolas, Menlo"/>
+              </a:rPr>
+              <a:t>/project:retro</a:t>
+            </a:r>
+          </a:p>
+        </p:txBody>
+      </p:sp>
+      <p:sp>
+        <p:nvSpPr>
+          <p:cNvPr id="22" name="TextBox 21"/>
+          <p:cNvSpPr txBox="1"/>
+          <p:nvPr/>
+        </p:nvSpPr>
+        <p:spPr>
+          <a:xfrm>
+            <a:off x="1188720" y="4663440"/>
+            <a:ext cx="4507992" cy="365760"/>
+          </a:xfrm>
+          <a:prstGeom prst="rect">
+            <a:avLst/>
+          </a:prstGeom>
+          <a:noFill/>
+        </p:spPr>
+        <p:txBody>
+          <a:bodyPr wrap="square" lIns="0" rIns="0" tIns="0" bIns="0" anchor="t">
+            <a:spAutoFit/>
+          </a:bodyPr>
+          <a:lstStyle/>
+          <a:p>
+            <a:pPr algn="l"/>
+            <a:r>
+              <a:rPr sz="1500" b="1">
+                <a:solidFill>
+                  <a:srgbClr val="1F2A37"/>
+                </a:solidFill>
+                <a:latin typeface="맑은 고딕"/>
+              </a:rPr>
+              <a:t>회고 + 통계</a:t>
+            </a:r>
+          </a:p>
+        </p:txBody>
+      </p:sp>
+      <p:sp>
+        <p:nvSpPr>
+          <p:cNvPr id="23" name="TextBox 22"/>
+          <p:cNvSpPr txBox="1"/>
+          <p:nvPr/>
+        </p:nvSpPr>
+        <p:spPr>
+          <a:xfrm>
+            <a:off x="1188720" y="5074920"/>
+            <a:ext cx="4507992" cy="1188720"/>
+          </a:xfrm>
+          <a:prstGeom prst="rect">
+            <a:avLst/>
+          </a:prstGeom>
+          <a:noFill/>
+        </p:spPr>
+        <p:txBody>
+          <a:bodyPr wrap="square" lIns="0" rIns="0" tIns="0" bIns="0" anchor="t">
+            <a:spAutoFit/>
+          </a:bodyPr>
+          <a:lstStyle/>
+          <a:p>
+            <a:pPr algn="l"/>
+            <a:r>
+              <a:rPr sz="1200" b="0">
+                <a:solidFill>
+                  <a:srgbClr val="1F2A37"/>
+                </a:solidFill>
+                <a:latin typeface="맑은 고딕"/>
+              </a:rPr>
+              <a:t>analytics.jsonl 기간별 집계</a:t>
+            </a:r>
+          </a:p>
+          <a:p>
+            <a:pPr algn="l"/>
+            <a:r>
+              <a:rPr sz="1200" b="0">
+                <a:solidFill>
+                  <a:srgbClr val="1F2A37"/>
+                </a:solidFill>
+                <a:latin typeface="맑은 고딕"/>
+              </a:rPr>
+              <a:t>--week · --month · --since FXXX · --all</a:t>
+            </a:r>
+          </a:p>
+          <a:p>
+            <a:pPr algn="l"/>
+            <a:r>
+              <a:rPr sz="1200" b="0">
+                <a:solidFill>
+                  <a:srgbClr val="1F2A37"/>
+                </a:solidFill>
+                <a:latin typeface="맑은 고딕"/>
+              </a:rPr>
+              <a:t>리뷰 반복 3회+ → ESCALATION 후보</a:t>
+            </a:r>
+          </a:p>
+        </p:txBody>
+      </p:sp>
+      <p:sp>
+        <p:nvSpPr>
+          <p:cNvPr id="24" name="Rounded Rectangle 23"/>
+          <p:cNvSpPr/>
+          <p:nvPr/>
+        </p:nvSpPr>
+        <p:spPr>
+          <a:xfrm>
+            <a:off x="6355080" y="4069080"/>
+            <a:ext cx="5056632" cy="2286000"/>
+          </a:xfrm>
+          <a:prstGeom prst="roundRect">
+            <a:avLst>
+              <a:gd name="adj" fmla="val 8000"/>
+            </a:avLst>
+          </a:prstGeom>
+          <a:solidFill>
+            <a:srgbClr val="FFFFFF"/>
+          </a:solidFill>
+          <a:ln w="9525">
+            <a:solidFill>
+              <a:srgbClr val="E5E7EB"/>
+            </a:solidFill>
+          </a:ln>
+          <a:effectLst/>
+        </p:spPr>
+        <p:style>
+          <a:lnRef idx="1">
+            <a:schemeClr val="accent1"/>
+          </a:lnRef>
+          <a:fillRef idx="3">
+            <a:schemeClr val="accent1"/>
+          </a:fillRef>
+          <a:effectRef idx="2">
+            <a:schemeClr val="accent1"/>
+          </a:effectRef>
+          <a:fontRef idx="minor">
+            <a:schemeClr val="lt1"/>
+          </a:fontRef>
+        </p:style>
+        <p:txBody>
+          <a:bodyPr rtlCol="0" anchor="ctr"/>
+          <a:lstStyle/>
+          <a:p>
+            <a:pPr algn="ctr"/>
+          </a:p>
+        </p:txBody>
+      </p:sp>
+      <p:sp>
+        <p:nvSpPr>
+          <p:cNvPr id="25" name="Rectangle 24"/>
+          <p:cNvSpPr/>
+          <p:nvPr/>
+        </p:nvSpPr>
+        <p:spPr>
+          <a:xfrm>
+            <a:off x="6355080" y="4069080"/>
+            <a:ext cx="182880" cy="2286000"/>
+          </a:xfrm>
+          <a:prstGeom prst="rect">
+            <a:avLst/>
+          </a:prstGeom>
+          <a:solidFill>
+            <a:srgbClr val="1F4E79"/>
+          </a:solidFill>
+          <a:ln>
+            <a:noFill/>
+          </a:ln>
+          <a:effectLst/>
+        </p:spPr>
+        <p:style>
+          <a:lnRef idx="1">
+            <a:schemeClr val="accent1"/>
+          </a:lnRef>
+          <a:fillRef idx="3">
+            <a:schemeClr val="accent1"/>
+          </a:fillRef>
+          <a:effectRef idx="2">
+            <a:schemeClr val="accent1"/>
+          </a:effectRef>
+          <a:fontRef idx="minor">
+            <a:schemeClr val="lt1"/>
+          </a:fontRef>
+        </p:style>
+        <p:txBody>
+          <a:bodyPr rtlCol="0" anchor="ctr"/>
+          <a:lstStyle/>
+          <a:p>
+            <a:pPr algn="ctr"/>
+          </a:p>
+        </p:txBody>
+      </p:sp>
+      <p:sp>
+        <p:nvSpPr>
+          <p:cNvPr id="26" name="TextBox 25"/>
+          <p:cNvSpPr txBox="1"/>
+          <p:nvPr/>
+        </p:nvSpPr>
+        <p:spPr>
+          <a:xfrm>
+            <a:off x="6766560" y="4251960"/>
+            <a:ext cx="4507992" cy="365760"/>
+          </a:xfrm>
+          <a:prstGeom prst="rect">
+            <a:avLst/>
+          </a:prstGeom>
+          <a:noFill/>
+        </p:spPr>
+        <p:txBody>
+          <a:bodyPr wrap="square" lIns="0" rIns="0" tIns="0" bIns="0" anchor="t">
+            <a:spAutoFit/>
+          </a:bodyPr>
+          <a:lstStyle/>
+          <a:p>
+            <a:pPr algn="l"/>
+            <a:r>
+              <a:rPr sz="1600" b="1">
+                <a:solidFill>
+                  <a:srgbClr val="1F4E79"/>
+                </a:solidFill>
+                <a:latin typeface="D2Coding, Consolas, Menlo"/>
+              </a:rPr>
+              <a:t>handoff Step 7 · session-end</a:t>
+            </a:r>
+          </a:p>
+        </p:txBody>
+      </p:sp>
+      <p:sp>
+        <p:nvSpPr>
+          <p:cNvPr id="27" name="TextBox 26"/>
+          <p:cNvSpPr txBox="1"/>
+          <p:nvPr/>
+        </p:nvSpPr>
+        <p:spPr>
+          <a:xfrm>
+            <a:off x="6766560" y="4663440"/>
+            <a:ext cx="4507992" cy="365760"/>
+          </a:xfrm>
+          <a:prstGeom prst="rect">
+            <a:avLst/>
+          </a:prstGeom>
+          <a:noFill/>
+        </p:spPr>
+        <p:txBody>
+          <a:bodyPr wrap="square" lIns="0" rIns="0" tIns="0" bIns="0" anchor="t">
+            <a:spAutoFit/>
+          </a:bodyPr>
+          <a:lstStyle/>
+          <a:p>
+            <a:pPr algn="l"/>
+            <a:r>
+              <a:rPr sz="1500" b="1">
+                <a:solidFill>
+                  <a:srgbClr val="1F2A37"/>
+                </a:solidFill>
+                <a:latin typeface="맑은 고딕"/>
+              </a:rPr>
+              <a:t>자동 analytics 누적</a:t>
+            </a:r>
+          </a:p>
+        </p:txBody>
+      </p:sp>
+      <p:sp>
+        <p:nvSpPr>
+          <p:cNvPr id="28" name="TextBox 27"/>
+          <p:cNvSpPr txBox="1"/>
+          <p:nvPr/>
+        </p:nvSpPr>
+        <p:spPr>
+          <a:xfrm>
+            <a:off x="6766560" y="5074920"/>
+            <a:ext cx="4507992" cy="1188720"/>
+          </a:xfrm>
+          <a:prstGeom prst="rect">
+            <a:avLst/>
+          </a:prstGeom>
+          <a:noFill/>
+        </p:spPr>
+        <p:txBody>
+          <a:bodyPr wrap="square" lIns="0" rIns="0" tIns="0" bIns="0" anchor="t">
+            <a:spAutoFit/>
+          </a:bodyPr>
+          <a:lstStyle/>
+          <a:p>
+            <a:pPr algn="l"/>
+            <a:r>
+              <a:rPr sz="1200" b="0">
+                <a:solidFill>
+                  <a:srgbClr val="1F2A37"/>
+                </a:solidFill>
+                <a:latin typeface="맑은 고딕"/>
+              </a:rPr>
+              <a:t>handoff 마다 이벤트 append</a:t>
+            </a:r>
+          </a:p>
+          <a:p>
+            <a:pPr algn="l"/>
+            <a:r>
+              <a:rPr sz="1200" b="0">
+                <a:solidFill>
+                  <a:srgbClr val="1F2A37"/>
+                </a:solidFill>
+                <a:latin typeface="맑은 고딕"/>
+              </a:rPr>
+              <a:t>session_end · review_iteration 기록</a:t>
+            </a:r>
+          </a:p>
+          <a:p>
+            <a:pPr algn="l"/>
+            <a:r>
+              <a:rPr sz="1200" b="0">
+                <a:solidFill>
+                  <a:srgbClr val="1F2A37"/>
+                </a:solidFill>
+                <a:latin typeface="맑은 고딕"/>
+              </a:rPr>
+              <a:t>retro 가 분석 — 별도 작업 불필요</a:t>
+            </a:r>
+          </a:p>
+        </p:txBody>
+      </p:sp>
+    </p:spTree>
+  </p:cSld>
+  <p:clrMapOvr>
+    <a:masterClrMapping/>
+  </p:clrMapOvr>
+</p:sld>
+</file>
+
+<file path=ppt/slides/slide17.xml><?xml version="1.0" encoding="utf-8"?>
+<p:sld xmlns:a="http://schemas.openxmlformats.org/drawingml/2006/main" xmlns:p="http://schemas.openxmlformats.org/presentationml/2006/main" xmlns:r="http://schemas.openxmlformats.org/officeDocument/2006/relationships">
+  <p:cSld>
+    <p:spTree>
+      <p:nvGrpSpPr>
+        <p:cNvPr id="1" name=""/>
+        <p:cNvGrpSpPr/>
+        <p:nvPr/>
+      </p:nvGrpSpPr>
+      <p:grpSpPr/>
+      <p:sp>
+        <p:nvSpPr>
+          <p:cNvPr id="2" name="Rectangle 1"/>
+          <p:cNvSpPr/>
+          <p:nvPr/>
+        </p:nvSpPr>
+        <p:spPr>
+          <a:xfrm>
+            <a:off x="0" y="0"/>
+            <a:ext cx="12191695" cy="6858000"/>
+          </a:xfrm>
+          <a:prstGeom prst="rect">
+            <a:avLst/>
+          </a:prstGeom>
+          <a:solidFill>
+            <a:srgbClr val="FFFFFF"/>
+          </a:solidFill>
+          <a:ln>
+            <a:noFill/>
+          </a:ln>
+          <a:effectLst/>
+        </p:spPr>
+        <p:style>
+          <a:lnRef idx="1">
+            <a:schemeClr val="accent1"/>
+          </a:lnRef>
+          <a:fillRef idx="3">
+            <a:schemeClr val="accent1"/>
+          </a:fillRef>
+          <a:effectRef idx="2">
+            <a:schemeClr val="accent1"/>
+          </a:effectRef>
+          <a:fontRef idx="minor">
+            <a:schemeClr val="lt1"/>
+          </a:fontRef>
+        </p:style>
+        <p:txBody>
+          <a:bodyPr rtlCol="0" anchor="ctr"/>
+          <a:lstStyle/>
+          <a:p>
+            <a:pPr algn="ctr"/>
+          </a:p>
+        </p:txBody>
+      </p:sp>
+      <p:sp>
+        <p:nvSpPr>
+          <p:cNvPr id="3" name="Rectangle 2"/>
+          <p:cNvSpPr/>
+          <p:nvPr/>
+        </p:nvSpPr>
+        <p:spPr>
+          <a:xfrm>
+            <a:off x="548640" y="502920"/>
+            <a:ext cx="109728" cy="438912"/>
+          </a:xfrm>
+          <a:prstGeom prst="rect">
+            <a:avLst/>
+          </a:prstGeom>
+          <a:solidFill>
+            <a:srgbClr val="1F4E79"/>
+          </a:solidFill>
+          <a:ln>
+            <a:noFill/>
+          </a:ln>
+          <a:effectLst/>
+        </p:spPr>
+        <p:style>
+          <a:lnRef idx="1">
+            <a:schemeClr val="accent1"/>
+          </a:lnRef>
+          <a:fillRef idx="3">
+            <a:schemeClr val="accent1"/>
+          </a:fillRef>
+          <a:effectRef idx="2">
+            <a:schemeClr val="accent1"/>
+          </a:effectRef>
+          <a:fontRef idx="minor">
+            <a:schemeClr val="lt1"/>
+          </a:fontRef>
+        </p:style>
+        <p:txBody>
+          <a:bodyPr rtlCol="0" anchor="ctr"/>
+          <a:lstStyle/>
+          <a:p>
+            <a:pPr algn="ctr"/>
+          </a:p>
+        </p:txBody>
+      </p:sp>
+      <p:sp>
+        <p:nvSpPr>
+          <p:cNvPr id="4" name="TextBox 3"/>
+          <p:cNvSpPr txBox="1"/>
+          <p:nvPr/>
+        </p:nvSpPr>
+        <p:spPr>
+          <a:xfrm>
+            <a:off x="777240" y="457200"/>
+            <a:ext cx="9144000" cy="274320"/>
+          </a:xfrm>
+          <a:prstGeom prst="rect">
+            <a:avLst/>
+          </a:prstGeom>
+          <a:noFill/>
+        </p:spPr>
+        <p:txBody>
+          <a:bodyPr wrap="square" lIns="0" rIns="0" tIns="0" bIns="0" anchor="t">
+            <a:spAutoFit/>
+          </a:bodyPr>
+          <a:lstStyle/>
+          <a:p>
+            <a:pPr algn="l"/>
+            <a:r>
+              <a:rPr sz="1100" b="1">
+                <a:solidFill>
+                  <a:srgbClr val="1F4E79"/>
+                </a:solidFill>
+                <a:latin typeface="맑은 고딕"/>
+              </a:rPr>
+              <a:t>PHASE 3 UPGRADE · Brain (Cross-project)</a:t>
+            </a:r>
+          </a:p>
+        </p:txBody>
+      </p:sp>
+      <p:sp>
+        <p:nvSpPr>
+          <p:cNvPr id="5" name="TextBox 4"/>
+          <p:cNvSpPr txBox="1"/>
+          <p:nvPr/>
+        </p:nvSpPr>
+        <p:spPr>
+          <a:xfrm>
+            <a:off x="777240" y="685800"/>
+            <a:ext cx="10515600" cy="502920"/>
+          </a:xfrm>
+          <a:prstGeom prst="rect">
+            <a:avLst/>
+          </a:prstGeom>
+          <a:noFill/>
+        </p:spPr>
+        <p:txBody>
+          <a:bodyPr wrap="square" lIns="0" rIns="0" tIns="0" bIns="0" anchor="t">
+            <a:spAutoFit/>
+          </a:bodyPr>
+          <a:lstStyle/>
+          <a:p>
+            <a:pPr algn="l"/>
+            <a:r>
+              <a:rPr sz="2600" b="1">
+                <a:solidFill>
+                  <a:srgbClr val="1F2A37"/>
+                </a:solidFill>
+                <a:latin typeface="맑은 고딕"/>
+              </a:rPr>
+              <a:t>SQLite 기반 영구 지식</a:t>
+            </a:r>
+          </a:p>
+        </p:txBody>
+      </p:sp>
+      <p:sp>
+        <p:nvSpPr>
+          <p:cNvPr id="6" name="Rectangle 5"/>
+          <p:cNvSpPr/>
+          <p:nvPr/>
+        </p:nvSpPr>
+        <p:spPr>
+          <a:xfrm>
+            <a:off x="548640" y="1298448"/>
+            <a:ext cx="11091672" cy="9525"/>
+          </a:xfrm>
+          <a:prstGeom prst="rect">
+            <a:avLst/>
+          </a:prstGeom>
+          <a:solidFill>
+            <a:srgbClr val="E5E7EB"/>
+          </a:solidFill>
+          <a:ln>
+            <a:noFill/>
+          </a:ln>
+          <a:effectLst/>
+        </p:spPr>
+        <p:style>
+          <a:lnRef idx="1">
+            <a:schemeClr val="accent1"/>
+          </a:lnRef>
+          <a:fillRef idx="3">
+            <a:schemeClr val="accent1"/>
+          </a:fillRef>
+          <a:effectRef idx="2">
+            <a:schemeClr val="accent1"/>
+          </a:effectRef>
+          <a:fontRef idx="minor">
+            <a:schemeClr val="lt1"/>
+          </a:fontRef>
+        </p:style>
+        <p:txBody>
+          <a:bodyPr rtlCol="0" anchor="ctr"/>
+          <a:lstStyle/>
+          <a:p>
+            <a:pPr algn="ctr"/>
+          </a:p>
+        </p:txBody>
+      </p:sp>
+      <p:sp>
+        <p:nvSpPr>
+          <p:cNvPr id="7" name="TextBox 6"/>
+          <p:cNvSpPr txBox="1"/>
+          <p:nvPr/>
+        </p:nvSpPr>
+        <p:spPr>
+          <a:xfrm>
+            <a:off x="10972800" y="6446520"/>
+            <a:ext cx="1097280" cy="274320"/>
+          </a:xfrm>
+          <a:prstGeom prst="rect">
+            <a:avLst/>
+          </a:prstGeom>
+          <a:noFill/>
+        </p:spPr>
+        <p:txBody>
+          <a:bodyPr wrap="square" lIns="0" rIns="0" tIns="0" bIns="0" anchor="t">
+            <a:spAutoFit/>
+          </a:bodyPr>
+          <a:lstStyle/>
+          <a:p>
+            <a:pPr algn="r"/>
+            <a:r>
+              <a:rPr sz="1000" b="0">
+                <a:solidFill>
+                  <a:srgbClr val="6B7280"/>
+                </a:solidFill>
+                <a:latin typeface="맑은 고딕"/>
+              </a:rPr>
+              <a:t>11 / 17</a:t>
+            </a:r>
+          </a:p>
+        </p:txBody>
+      </p:sp>
+      <p:sp>
+        <p:nvSpPr>
+          <p:cNvPr id="8" name="TextBox 7"/>
+          <p:cNvSpPr txBox="1"/>
+          <p:nvPr/>
+        </p:nvSpPr>
+        <p:spPr>
+          <a:xfrm>
+            <a:off x="548640" y="6446520"/>
+            <a:ext cx="5486400" cy="274320"/>
+          </a:xfrm>
+          <a:prstGeom prst="rect">
+            <a:avLst/>
+          </a:prstGeom>
+          <a:noFill/>
+        </p:spPr>
+        <p:txBody>
+          <a:bodyPr wrap="square" lIns="0" rIns="0" tIns="0" bIns="0" anchor="t">
+            <a:spAutoFit/>
+          </a:bodyPr>
+          <a:lstStyle/>
+          <a:p>
+            <a:pPr algn="l"/>
+            <a:r>
+              <a:rPr sz="1000" b="0">
+                <a:solidFill>
+                  <a:srgbClr val="6B7280"/>
+                </a:solidFill>
+                <a:latin typeface="맑은 고딕"/>
+              </a:rPr>
+              <a:t>하네스 엔지니어링 템플릿 — harness-template</a:t>
+            </a:r>
+          </a:p>
+        </p:txBody>
+      </p:sp>
+      <p:sp>
+        <p:nvSpPr>
+          <p:cNvPr id="9" name="Rounded Rectangle 8"/>
+          <p:cNvSpPr/>
+          <p:nvPr/>
+        </p:nvSpPr>
+        <p:spPr>
+          <a:xfrm>
+            <a:off x="777240" y="1600200"/>
+            <a:ext cx="5056632" cy="2286000"/>
+          </a:xfrm>
+          <a:prstGeom prst="roundRect">
+            <a:avLst>
+              <a:gd name="adj" fmla="val 8000"/>
+            </a:avLst>
+          </a:prstGeom>
+          <a:solidFill>
+            <a:srgbClr val="FFFFFF"/>
+          </a:solidFill>
+          <a:ln w="9525">
+            <a:solidFill>
+              <a:srgbClr val="E5E7EB"/>
+            </a:solidFill>
+          </a:ln>
+          <a:effectLst/>
+        </p:spPr>
+        <p:style>
+          <a:lnRef idx="1">
+            <a:schemeClr val="accent1"/>
+          </a:lnRef>
+          <a:fillRef idx="3">
+            <a:schemeClr val="accent1"/>
+          </a:fillRef>
+          <a:effectRef idx="2">
+            <a:schemeClr val="accent1"/>
+          </a:effectRef>
+          <a:fontRef idx="minor">
+            <a:schemeClr val="lt1"/>
+          </a:fontRef>
+        </p:style>
+        <p:txBody>
+          <a:bodyPr rtlCol="0" anchor="ctr"/>
+          <a:lstStyle/>
+          <a:p>
+            <a:pPr algn="ctr"/>
+          </a:p>
+        </p:txBody>
+      </p:sp>
+      <p:sp>
+        <p:nvSpPr>
+          <p:cNvPr id="10" name="Rectangle 9"/>
+          <p:cNvSpPr/>
+          <p:nvPr/>
+        </p:nvSpPr>
+        <p:spPr>
+          <a:xfrm>
+            <a:off x="777240" y="1600200"/>
+            <a:ext cx="182880" cy="2286000"/>
+          </a:xfrm>
+          <a:prstGeom prst="rect">
+            <a:avLst/>
+          </a:prstGeom>
+          <a:solidFill>
+            <a:srgbClr val="1F4E79"/>
+          </a:solidFill>
+          <a:ln>
+            <a:noFill/>
+          </a:ln>
+          <a:effectLst/>
+        </p:spPr>
+        <p:style>
+          <a:lnRef idx="1">
+            <a:schemeClr val="accent1"/>
+          </a:lnRef>
+          <a:fillRef idx="3">
+            <a:schemeClr val="accent1"/>
+          </a:fillRef>
+          <a:effectRef idx="2">
+            <a:schemeClr val="accent1"/>
+          </a:effectRef>
+          <a:fontRef idx="minor">
+            <a:schemeClr val="lt1"/>
+          </a:fontRef>
+        </p:style>
+        <p:txBody>
+          <a:bodyPr rtlCol="0" anchor="ctr"/>
+          <a:lstStyle/>
+          <a:p>
+            <a:pPr algn="ctr"/>
+          </a:p>
+        </p:txBody>
+      </p:sp>
+      <p:sp>
+        <p:nvSpPr>
+          <p:cNvPr id="11" name="TextBox 10"/>
+          <p:cNvSpPr txBox="1"/>
+          <p:nvPr/>
+        </p:nvSpPr>
+        <p:spPr>
+          <a:xfrm>
+            <a:off x="1188720" y="1783080"/>
+            <a:ext cx="4507992" cy="365760"/>
+          </a:xfrm>
+          <a:prstGeom prst="rect">
+            <a:avLst/>
+          </a:prstGeom>
+          <a:noFill/>
+        </p:spPr>
+        <p:txBody>
+          <a:bodyPr wrap="square" lIns="0" rIns="0" tIns="0" bIns="0" anchor="t">
+            <a:spAutoFit/>
+          </a:bodyPr>
+          <a:lstStyle/>
+          <a:p>
+            <a:pPr algn="l"/>
+            <a:r>
+              <a:rPr sz="1600" b="1">
+                <a:solidFill>
+                  <a:srgbClr val="1F4E79"/>
+                </a:solidFill>
+                <a:latin typeface="D2Coding, Consolas, Menlo"/>
+              </a:rPr>
+              <a:t>/project:brain-sync</a:t>
+            </a:r>
+          </a:p>
+        </p:txBody>
+      </p:sp>
+      <p:sp>
+        <p:nvSpPr>
+          <p:cNvPr id="12" name="TextBox 11"/>
+          <p:cNvSpPr txBox="1"/>
+          <p:nvPr/>
+        </p:nvSpPr>
+        <p:spPr>
+          <a:xfrm>
+            <a:off x="1188720" y="2194560"/>
+            <a:ext cx="4507992" cy="365760"/>
+          </a:xfrm>
+          <a:prstGeom prst="rect">
+            <a:avLst/>
+          </a:prstGeom>
+          <a:noFill/>
+        </p:spPr>
+        <p:txBody>
+          <a:bodyPr wrap="square" lIns="0" rIns="0" tIns="0" bIns="0" anchor="t">
+            <a:spAutoFit/>
+          </a:bodyPr>
+          <a:lstStyle/>
+          <a:p>
+            <a:pPr algn="l"/>
+            <a:r>
+              <a:rPr sz="1500" b="1">
+                <a:solidFill>
+                  <a:srgbClr val="1F2A37"/>
+                </a:solidFill>
+                <a:latin typeface="맑은 고딕"/>
+              </a:rPr>
+              <a:t>Cross-project 동기화</a:t>
+            </a:r>
+          </a:p>
+        </p:txBody>
+      </p:sp>
+      <p:sp>
+        <p:nvSpPr>
+          <p:cNvPr id="13" name="TextBox 12"/>
+          <p:cNvSpPr txBox="1"/>
+          <p:nvPr/>
+        </p:nvSpPr>
+        <p:spPr>
+          <a:xfrm>
+            <a:off x="1188720" y="2606040"/>
+            <a:ext cx="4507992" cy="1188720"/>
+          </a:xfrm>
+          <a:prstGeom prst="rect">
+            <a:avLst/>
+          </a:prstGeom>
+          <a:noFill/>
+        </p:spPr>
+        <p:txBody>
+          <a:bodyPr wrap="square" lIns="0" rIns="0" tIns="0" bIns="0" anchor="t">
+            <a:spAutoFit/>
+          </a:bodyPr>
+          <a:lstStyle/>
+          <a:p>
+            <a:pPr algn="l"/>
+            <a:r>
+              <a:rPr sz="1200" b="0">
+                <a:solidFill>
+                  <a:srgbClr val="1F2A37"/>
+                </a:solidFill>
+                <a:latin typeface="맑은 고딕"/>
+              </a:rPr>
+              <a:t>learnings.jsonl + feature_list + ADRs</a:t>
+            </a:r>
+          </a:p>
+          <a:p>
+            <a:pPr algn="l"/>
+            <a:r>
+              <a:rPr sz="1200" b="0">
+                <a:solidFill>
+                  <a:srgbClr val="1F2A37"/>
+                </a:solidFill>
+                <a:latin typeface="맑은 고딕"/>
+              </a:rPr>
+              <a:t>~/.harness/brain.db (Python sqlite3)</a:t>
+            </a:r>
+          </a:p>
+          <a:p>
+            <a:pPr algn="l"/>
+            <a:r>
+              <a:rPr sz="1200" b="0">
+                <a:solidFill>
+                  <a:srgbClr val="1F2A37"/>
+                </a:solidFill>
+                <a:latin typeface="맑은 고딕"/>
+              </a:rPr>
+              <a:t>INSERT OR REPLACE — 멱등</a:t>
+            </a:r>
+          </a:p>
+        </p:txBody>
+      </p:sp>
+      <p:sp>
+        <p:nvSpPr>
+          <p:cNvPr id="14" name="Rounded Rectangle 13"/>
+          <p:cNvSpPr/>
+          <p:nvPr/>
+        </p:nvSpPr>
+        <p:spPr>
+          <a:xfrm>
+            <a:off x="6355080" y="1600200"/>
+            <a:ext cx="5056632" cy="2286000"/>
+          </a:xfrm>
+          <a:prstGeom prst="roundRect">
+            <a:avLst>
+              <a:gd name="adj" fmla="val 8000"/>
+            </a:avLst>
+          </a:prstGeom>
+          <a:solidFill>
+            <a:srgbClr val="FFFFFF"/>
+          </a:solidFill>
+          <a:ln w="9525">
+            <a:solidFill>
+              <a:srgbClr val="E5E7EB"/>
+            </a:solidFill>
+          </a:ln>
+          <a:effectLst/>
+        </p:spPr>
+        <p:style>
+          <a:lnRef idx="1">
+            <a:schemeClr val="accent1"/>
+          </a:lnRef>
+          <a:fillRef idx="3">
+            <a:schemeClr val="accent1"/>
+          </a:fillRef>
+          <a:effectRef idx="2">
+            <a:schemeClr val="accent1"/>
+          </a:effectRef>
+          <a:fontRef idx="minor">
+            <a:schemeClr val="lt1"/>
+          </a:fontRef>
+        </p:style>
+        <p:txBody>
+          <a:bodyPr rtlCol="0" anchor="ctr"/>
+          <a:lstStyle/>
+          <a:p>
+            <a:pPr algn="ctr"/>
+          </a:p>
+        </p:txBody>
+      </p:sp>
+      <p:sp>
+        <p:nvSpPr>
+          <p:cNvPr id="15" name="Rectangle 14"/>
+          <p:cNvSpPr/>
+          <p:nvPr/>
+        </p:nvSpPr>
+        <p:spPr>
+          <a:xfrm>
+            <a:off x="6355080" y="1600200"/>
+            <a:ext cx="182880" cy="2286000"/>
+          </a:xfrm>
+          <a:prstGeom prst="rect">
+            <a:avLst/>
+          </a:prstGeom>
+          <a:solidFill>
+            <a:srgbClr val="1F4E79"/>
+          </a:solidFill>
+          <a:ln>
+            <a:noFill/>
+          </a:ln>
+          <a:effectLst/>
+        </p:spPr>
+        <p:style>
+          <a:lnRef idx="1">
+            <a:schemeClr val="accent1"/>
+          </a:lnRef>
+          <a:fillRef idx="3">
+            <a:schemeClr val="accent1"/>
+          </a:fillRef>
+          <a:effectRef idx="2">
+            <a:schemeClr val="accent1"/>
+          </a:effectRef>
+          <a:fontRef idx="minor">
+            <a:schemeClr val="lt1"/>
+          </a:fontRef>
+        </p:style>
+        <p:txBody>
+          <a:bodyPr rtlCol="0" anchor="ctr"/>
+          <a:lstStyle/>
+          <a:p>
+            <a:pPr algn="ctr"/>
+          </a:p>
+        </p:txBody>
+      </p:sp>
+      <p:sp>
+        <p:nvSpPr>
+          <p:cNvPr id="16" name="TextBox 15"/>
+          <p:cNvSpPr txBox="1"/>
+          <p:nvPr/>
+        </p:nvSpPr>
+        <p:spPr>
+          <a:xfrm>
+            <a:off x="6766560" y="1783080"/>
+            <a:ext cx="4507992" cy="365760"/>
+          </a:xfrm>
+          <a:prstGeom prst="rect">
+            <a:avLst/>
+          </a:prstGeom>
+          <a:noFill/>
+        </p:spPr>
+        <p:txBody>
+          <a:bodyPr wrap="square" lIns="0" rIns="0" tIns="0" bIns="0" anchor="t">
+            <a:spAutoFit/>
+          </a:bodyPr>
+          <a:lstStyle/>
+          <a:p>
+            <a:pPr algn="l"/>
+            <a:r>
+              <a:rPr sz="1600" b="1">
+                <a:solidFill>
+                  <a:srgbClr val="1F4E79"/>
+                </a:solidFill>
+                <a:latin typeface="D2Coding, Consolas, Menlo"/>
+              </a:rPr>
+              <a:t>/project:brain-search &lt;q&gt;</a:t>
+            </a:r>
+          </a:p>
+        </p:txBody>
+      </p:sp>
+      <p:sp>
+        <p:nvSpPr>
+          <p:cNvPr id="17" name="TextBox 16"/>
+          <p:cNvSpPr txBox="1"/>
+          <p:nvPr/>
+        </p:nvSpPr>
+        <p:spPr>
+          <a:xfrm>
+            <a:off x="6766560" y="2194560"/>
+            <a:ext cx="4507992" cy="365760"/>
+          </a:xfrm>
+          <a:prstGeom prst="rect">
+            <a:avLst/>
+          </a:prstGeom>
+          <a:noFill/>
+        </p:spPr>
+        <p:txBody>
+          <a:bodyPr wrap="square" lIns="0" rIns="0" tIns="0" bIns="0" anchor="t">
+            <a:spAutoFit/>
+          </a:bodyPr>
+          <a:lstStyle/>
+          <a:p>
+            <a:pPr algn="l"/>
+            <a:r>
+              <a:rPr sz="1500" b="1">
+                <a:solidFill>
+                  <a:srgbClr val="1F2A37"/>
+                </a:solidFill>
+                <a:latin typeface="맑은 고딕"/>
+              </a:rPr>
+              <a:t>Cross-project 검색</a:t>
+            </a:r>
+          </a:p>
+        </p:txBody>
+      </p:sp>
+      <p:sp>
+        <p:nvSpPr>
+          <p:cNvPr id="18" name="TextBox 17"/>
+          <p:cNvSpPr txBox="1"/>
+          <p:nvPr/>
+        </p:nvSpPr>
+        <p:spPr>
+          <a:xfrm>
+            <a:off x="6766560" y="2606040"/>
+            <a:ext cx="4507992" cy="1188720"/>
+          </a:xfrm>
+          <a:prstGeom prst="rect">
+            <a:avLst/>
+          </a:prstGeom>
+          <a:noFill/>
+        </p:spPr>
+        <p:txBody>
+          <a:bodyPr wrap="square" lIns="0" rIns="0" tIns="0" bIns="0" anchor="t">
+            <a:spAutoFit/>
+          </a:bodyPr>
+          <a:lstStyle/>
+          <a:p>
+            <a:pPr algn="l"/>
+            <a:r>
+              <a:rPr sz="1200" b="0">
+                <a:solidFill>
+                  <a:srgbClr val="1F2A37"/>
+                </a:solidFill>
+                <a:latin typeface="맑은 고딕"/>
+              </a:rPr>
+              <a:t>모든 프로젝트 learnings + ADRs + features</a:t>
+            </a:r>
+          </a:p>
+          <a:p>
+            <a:pPr algn="l"/>
+            <a:r>
+              <a:rPr sz="1200" b="0">
+                <a:solidFill>
+                  <a:srgbClr val="1F2A37"/>
+                </a:solidFill>
+                <a:latin typeface="맑은 고딕"/>
+              </a:rPr>
+              <a:t>--project · --type 필터</a:t>
+            </a:r>
+          </a:p>
+          <a:p>
+            <a:pPr algn="l"/>
+            <a:r>
+              <a:rPr sz="1200" b="0">
+                <a:solidFill>
+                  <a:srgbClr val="1F2A37"/>
+                </a:solidFill>
+                <a:latin typeface="맑은 고딕"/>
+              </a:rPr>
+              <a:t>빈 query + filter 조합 허용</a:t>
+            </a:r>
+          </a:p>
+        </p:txBody>
+      </p:sp>
+      <p:sp>
+        <p:nvSpPr>
+          <p:cNvPr id="19" name="Rounded Rectangle 18"/>
+          <p:cNvSpPr/>
+          <p:nvPr/>
+        </p:nvSpPr>
+        <p:spPr>
+          <a:xfrm>
+            <a:off x="777240" y="4069080"/>
+            <a:ext cx="5056632" cy="2286000"/>
+          </a:xfrm>
+          <a:prstGeom prst="roundRect">
+            <a:avLst>
+              <a:gd name="adj" fmla="val 8000"/>
+            </a:avLst>
+          </a:prstGeom>
+          <a:solidFill>
+            <a:srgbClr val="FFFFFF"/>
+          </a:solidFill>
+          <a:ln w="9525">
+            <a:solidFill>
+              <a:srgbClr val="E5E7EB"/>
+            </a:solidFill>
+          </a:ln>
+          <a:effectLst/>
+        </p:spPr>
+        <p:style>
+          <a:lnRef idx="1">
+            <a:schemeClr val="accent1"/>
+          </a:lnRef>
+          <a:fillRef idx="3">
+            <a:schemeClr val="accent1"/>
+          </a:fillRef>
+          <a:effectRef idx="2">
+            <a:schemeClr val="accent1"/>
+          </a:effectRef>
+          <a:fontRef idx="minor">
+            <a:schemeClr val="lt1"/>
+          </a:fontRef>
+        </p:style>
+        <p:txBody>
+          <a:bodyPr rtlCol="0" anchor="ctr"/>
+          <a:lstStyle/>
+          <a:p>
+            <a:pPr algn="ctr"/>
+          </a:p>
+        </p:txBody>
+      </p:sp>
+      <p:sp>
+        <p:nvSpPr>
+          <p:cNvPr id="20" name="Rectangle 19"/>
+          <p:cNvSpPr/>
+          <p:nvPr/>
+        </p:nvSpPr>
+        <p:spPr>
+          <a:xfrm>
+            <a:off x="777240" y="4069080"/>
+            <a:ext cx="182880" cy="2286000"/>
+          </a:xfrm>
+          <a:prstGeom prst="rect">
+            <a:avLst/>
+          </a:prstGeom>
+          <a:solidFill>
+            <a:srgbClr val="1F4E79"/>
+          </a:solidFill>
+          <a:ln>
+            <a:noFill/>
+          </a:ln>
+          <a:effectLst/>
+        </p:spPr>
+        <p:style>
+          <a:lnRef idx="1">
+            <a:schemeClr val="accent1"/>
+          </a:lnRef>
+          <a:fillRef idx="3">
+            <a:schemeClr val="accent1"/>
+          </a:fillRef>
+          <a:effectRef idx="2">
+            <a:schemeClr val="accent1"/>
+          </a:effectRef>
+          <a:fontRef idx="minor">
+            <a:schemeClr val="lt1"/>
+          </a:fontRef>
+        </p:style>
+        <p:txBody>
+          <a:bodyPr rtlCol="0" anchor="ctr"/>
+          <a:lstStyle/>
+          <a:p>
+            <a:pPr algn="ctr"/>
+          </a:p>
+        </p:txBody>
+      </p:sp>
+      <p:sp>
+        <p:nvSpPr>
+          <p:cNvPr id="21" name="TextBox 20"/>
+          <p:cNvSpPr txBox="1"/>
+          <p:nvPr/>
+        </p:nvSpPr>
+        <p:spPr>
+          <a:xfrm>
+            <a:off x="1188720" y="4251960"/>
+            <a:ext cx="4507992" cy="365760"/>
+          </a:xfrm>
+          <a:prstGeom prst="rect">
+            <a:avLst/>
+          </a:prstGeom>
+          <a:noFill/>
+        </p:spPr>
+        <p:txBody>
+          <a:bodyPr wrap="square" lIns="0" rIns="0" tIns="0" bIns="0" anchor="t">
+            <a:spAutoFit/>
+          </a:bodyPr>
+          <a:lstStyle/>
+          <a:p>
+            <a:pPr algn="l"/>
+            <a:r>
+              <a:rPr sz="1600" b="1">
+                <a:solidFill>
+                  <a:srgbClr val="1F4E79"/>
+                </a:solidFill>
+                <a:latin typeface="D2Coding, Consolas, Menlo"/>
+              </a:rPr>
+              <a:t>/project:brain-stats</a:t>
+            </a:r>
+          </a:p>
+        </p:txBody>
+      </p:sp>
+      <p:sp>
+        <p:nvSpPr>
+          <p:cNvPr id="22" name="TextBox 21"/>
+          <p:cNvSpPr txBox="1"/>
+          <p:nvPr/>
+        </p:nvSpPr>
+        <p:spPr>
+          <a:xfrm>
+            <a:off x="1188720" y="4663440"/>
+            <a:ext cx="4507992" cy="365760"/>
+          </a:xfrm>
+          <a:prstGeom prst="rect">
+            <a:avLst/>
+          </a:prstGeom>
+          <a:noFill/>
+        </p:spPr>
+        <p:txBody>
+          <a:bodyPr wrap="square" lIns="0" rIns="0" tIns="0" bIns="0" anchor="t">
+            <a:spAutoFit/>
+          </a:bodyPr>
+          <a:lstStyle/>
+          <a:p>
+            <a:pPr algn="l"/>
+            <a:r>
+              <a:rPr sz="1500" b="1">
+                <a:solidFill>
+                  <a:srgbClr val="1F2A37"/>
+                </a:solidFill>
+                <a:latin typeface="맑은 고딕"/>
+              </a:rPr>
+              <a:t>Brain 통계</a:t>
+            </a:r>
+          </a:p>
+        </p:txBody>
+      </p:sp>
+      <p:sp>
+        <p:nvSpPr>
+          <p:cNvPr id="23" name="TextBox 22"/>
+          <p:cNvSpPr txBox="1"/>
+          <p:nvPr/>
+        </p:nvSpPr>
+        <p:spPr>
+          <a:xfrm>
+            <a:off x="1188720" y="5074920"/>
+            <a:ext cx="4507992" cy="1188720"/>
+          </a:xfrm>
+          <a:prstGeom prst="rect">
+            <a:avLst/>
+          </a:prstGeom>
+          <a:noFill/>
+        </p:spPr>
+        <p:txBody>
+          <a:bodyPr wrap="square" lIns="0" rIns="0" tIns="0" bIns="0" anchor="t">
+            <a:spAutoFit/>
+          </a:bodyPr>
+          <a:lstStyle/>
+          <a:p>
+            <a:pPr algn="l"/>
+            <a:r>
+              <a:rPr sz="1200" b="0">
+                <a:solidFill>
+                  <a:srgbClr val="1F2A37"/>
+                </a:solidFill>
+                <a:latin typeface="맑은 고딕"/>
+              </a:rPr>
+              <a:t>전체 또는 --project 별</a:t>
+            </a:r>
+          </a:p>
+          <a:p>
+            <a:pPr algn="l"/>
+            <a:r>
+              <a:rPr sz="1200" b="0">
+                <a:solidFill>
+                  <a:srgbClr val="1F2A37"/>
+                </a:solidFill>
+                <a:latin typeface="맑은 고딕"/>
+              </a:rPr>
+              <a:t>projects · learnings · features · ADRs</a:t>
+            </a:r>
+          </a:p>
+          <a:p>
+            <a:pPr algn="l"/>
+            <a:r>
+              <a:rPr sz="1200" b="0">
+                <a:solidFill>
+                  <a:srgbClr val="1F2A37"/>
+                </a:solidFill>
+                <a:latin typeface="맑은 고딕"/>
+              </a:rPr>
+              <a:t>type 분포 · last sync 시각</a:t>
+            </a:r>
+          </a:p>
+        </p:txBody>
+      </p:sp>
+      <p:sp>
+        <p:nvSpPr>
+          <p:cNvPr id="24" name="Rounded Rectangle 23"/>
+          <p:cNvSpPr/>
+          <p:nvPr/>
+        </p:nvSpPr>
+        <p:spPr>
+          <a:xfrm>
+            <a:off x="6355080" y="4069080"/>
+            <a:ext cx="5056632" cy="2286000"/>
+          </a:xfrm>
+          <a:prstGeom prst="roundRect">
+            <a:avLst>
+              <a:gd name="adj" fmla="val 8000"/>
+            </a:avLst>
+          </a:prstGeom>
+          <a:solidFill>
+            <a:srgbClr val="FFFFFF"/>
+          </a:solidFill>
+          <a:ln w="9525">
+            <a:solidFill>
+              <a:srgbClr val="E5E7EB"/>
+            </a:solidFill>
+          </a:ln>
+          <a:effectLst/>
+        </p:spPr>
+        <p:style>
+          <a:lnRef idx="1">
+            <a:schemeClr val="accent1"/>
+          </a:lnRef>
+          <a:fillRef idx="3">
+            <a:schemeClr val="accent1"/>
+          </a:fillRef>
+          <a:effectRef idx="2">
+            <a:schemeClr val="accent1"/>
+          </a:effectRef>
+          <a:fontRef idx="minor">
+            <a:schemeClr val="lt1"/>
+          </a:fontRef>
+        </p:style>
+        <p:txBody>
+          <a:bodyPr rtlCol="0" anchor="ctr"/>
+          <a:lstStyle/>
+          <a:p>
+            <a:pPr algn="ctr"/>
+          </a:p>
+        </p:txBody>
+      </p:sp>
+      <p:sp>
+        <p:nvSpPr>
+          <p:cNvPr id="25" name="Rectangle 24"/>
+          <p:cNvSpPr/>
+          <p:nvPr/>
+        </p:nvSpPr>
+        <p:spPr>
+          <a:xfrm>
+            <a:off x="6355080" y="4069080"/>
+            <a:ext cx="182880" cy="2286000"/>
+          </a:xfrm>
+          <a:prstGeom prst="rect">
+            <a:avLst/>
+          </a:prstGeom>
+          <a:solidFill>
+            <a:srgbClr val="1F4E79"/>
+          </a:solidFill>
+          <a:ln>
+            <a:noFill/>
+          </a:ln>
+          <a:effectLst/>
+        </p:spPr>
+        <p:style>
+          <a:lnRef idx="1">
+            <a:schemeClr val="accent1"/>
+          </a:lnRef>
+          <a:fillRef idx="3">
+            <a:schemeClr val="accent1"/>
+          </a:fillRef>
+          <a:effectRef idx="2">
+            <a:schemeClr val="accent1"/>
+          </a:effectRef>
+          <a:fontRef idx="minor">
+            <a:schemeClr val="lt1"/>
+          </a:fontRef>
+        </p:style>
+        <p:txBody>
+          <a:bodyPr rtlCol="0" anchor="ctr"/>
+          <a:lstStyle/>
+          <a:p>
+            <a:pPr algn="ctr"/>
+          </a:p>
+        </p:txBody>
+      </p:sp>
+      <p:sp>
+        <p:nvSpPr>
+          <p:cNvPr id="26" name="TextBox 25"/>
+          <p:cNvSpPr txBox="1"/>
+          <p:nvPr/>
+        </p:nvSpPr>
+        <p:spPr>
+          <a:xfrm>
+            <a:off x="6766560" y="4251960"/>
+            <a:ext cx="4507992" cy="365760"/>
+          </a:xfrm>
+          <a:prstGeom prst="rect">
+            <a:avLst/>
+          </a:prstGeom>
+          <a:noFill/>
+        </p:spPr>
+        <p:txBody>
+          <a:bodyPr wrap="square" lIns="0" rIns="0" tIns="0" bIns="0" anchor="t">
+            <a:spAutoFit/>
+          </a:bodyPr>
+          <a:lstStyle/>
+          <a:p>
+            <a:pPr algn="l"/>
+            <a:r>
+              <a:rPr sz="1600" b="1">
+                <a:solidFill>
+                  <a:srgbClr val="1F4E79"/>
+                </a:solidFill>
+                <a:latin typeface="D2Coding, Consolas, Menlo"/>
+              </a:rPr>
+              <a:t>/project:brain-list</a:t>
+            </a:r>
+          </a:p>
+        </p:txBody>
+      </p:sp>
+      <p:sp>
+        <p:nvSpPr>
+          <p:cNvPr id="27" name="TextBox 26"/>
+          <p:cNvSpPr txBox="1"/>
+          <p:nvPr/>
+        </p:nvSpPr>
+        <p:spPr>
+          <a:xfrm>
+            <a:off x="6766560" y="4663440"/>
+            <a:ext cx="4507992" cy="365760"/>
+          </a:xfrm>
+          <a:prstGeom prst="rect">
+            <a:avLst/>
+          </a:prstGeom>
+          <a:noFill/>
+        </p:spPr>
+        <p:txBody>
+          <a:bodyPr wrap="square" lIns="0" rIns="0" tIns="0" bIns="0" anchor="t">
+            <a:spAutoFit/>
+          </a:bodyPr>
+          <a:lstStyle/>
+          <a:p>
+            <a:pPr algn="l"/>
+            <a:r>
+              <a:rPr sz="1500" b="1">
+                <a:solidFill>
+                  <a:srgbClr val="1F2A37"/>
+                </a:solidFill>
+                <a:latin typeface="맑은 고딕"/>
+              </a:rPr>
+              <a:t>등록 프로젝트 목록</a:t>
+            </a:r>
+          </a:p>
+        </p:txBody>
+      </p:sp>
+      <p:sp>
+        <p:nvSpPr>
+          <p:cNvPr id="28" name="TextBox 27"/>
+          <p:cNvSpPr txBox="1"/>
+          <p:nvPr/>
+        </p:nvSpPr>
+        <p:spPr>
+          <a:xfrm>
+            <a:off x="6766560" y="5074920"/>
+            <a:ext cx="4507992" cy="1188720"/>
+          </a:xfrm>
+          <a:prstGeom prst="rect">
+            <a:avLst/>
+          </a:prstGeom>
+          <a:noFill/>
+        </p:spPr>
+        <p:txBody>
+          <a:bodyPr wrap="square" lIns="0" rIns="0" tIns="0" bIns="0" anchor="t">
+            <a:spAutoFit/>
+          </a:bodyPr>
+          <a:lstStyle/>
+          <a:p>
+            <a:pPr algn="l"/>
+            <a:r>
+              <a:rPr sz="1200" b="0">
+                <a:solidFill>
+                  <a:srgbClr val="1F2A37"/>
+                </a:solidFill>
+                <a:latin typeface="맑은 고딕"/>
+              </a:rPr>
+              <a:t>slug · path · remote URL</a:t>
+            </a:r>
+          </a:p>
+          <a:p>
+            <a:pPr algn="l"/>
+            <a:r>
+              <a:rPr sz="1200" b="0">
+                <a:solidFill>
+                  <a:srgbClr val="1F2A37"/>
+                </a:solidFill>
+                <a:latin typeface="맑은 고딕"/>
+              </a:rPr>
+              <a:t>first_seen · last_seen 표시</a:t>
+            </a:r>
+          </a:p>
+          <a:p>
+            <a:pPr algn="l"/>
+            <a:r>
+              <a:rPr sz="1200" b="0">
+                <a:solidFill>
+                  <a:srgbClr val="1F2A37"/>
+                </a:solidFill>
+                <a:latin typeface="맑은 고딕"/>
+              </a:rPr>
+              <a:t>오래된 sync → 갱신 권장</a:t>
+            </a:r>
+          </a:p>
+        </p:txBody>
+      </p:sp>
+    </p:spTree>
+  </p:cSld>
+  <p:clrMapOvr>
+    <a:masterClrMapping/>
+  </p:clrMapOvr>
+</p:sld>
+</file>
+
 <file path=ppt/slides/slide2.xml><?xml version="1.0" encoding="utf-8"?>
 <p:sld xmlns:a="http://schemas.openxmlformats.org/drawingml/2006/main" xmlns:p="http://schemas.openxmlformats.org/presentationml/2006/main" xmlns:r="http://schemas.openxmlformats.org/officeDocument/2006/relationships">
   <p:cSld>
@@ -9476,7 +13001,7 @@
                 </a:solidFill>
                 <a:latin typeface="맑은 고딕"/>
               </a:rPr>
-              <a:t>2 / 14</a:t>
+              <a:t>2 / 17</a:t>
             </a:r>
           </a:p>
         </p:txBody>
@@ -10511,7 +14036,7 @@
                 </a:solidFill>
                 <a:latin typeface="맑은 고딕"/>
               </a:rPr>
-              <a:t>3 / 14</a:t>
+              <a:t>3 / 17</a:t>
             </a:r>
           </a:p>
         </p:txBody>
@@ -11655,7 +15180,7 @@
                 </a:solidFill>
                 <a:latin typeface="맑은 고딕"/>
               </a:rPr>
-              <a:t>4 / 14</a:t>
+              <a:t>4 / 17</a:t>
             </a:r>
           </a:p>
         </p:txBody>
@@ -13289,7 +16814,7 @@
                 </a:solidFill>
                 <a:latin typeface="맑은 고딕"/>
               </a:rPr>
-              <a:t>5 / 14</a:t>
+              <a:t>5 / 17</a:t>
             </a:r>
           </a:p>
         </p:txBody>
@@ -13501,7 +17026,7 @@
                 </a:solidFill>
                 <a:latin typeface="D2Coding, Consolas, Menlo"/>
               </a:rPr>
-              <a:t>    ├── settings.json         ← 훅 설정 (Claude Code 공식 위치)</a:t>
+              <a:t>    ├── settings.json         ← 훅 설정</a:t>
             </a:r>
           </a:p>
           <a:p>
@@ -13525,7 +17050,7 @@
                 </a:solidFill>
                 <a:latin typeface="D2Coding, Consolas, Menlo"/>
               </a:rPr>
-              <a:t>    │   ├── planner.md · architect.md · developer.md</a:t>
+              <a:t>    ├── commands/             ← 슬래시 커맨드 17개 (기본 4 + Phase 1·2·3 = 13)</a:t>
             </a:r>
           </a:p>
           <a:p>
@@ -13537,7 +17062,7 @@
                 </a:solidFill>
                 <a:latin typeface="D2Coding, Consolas, Menlo"/>
               </a:rPr>
-              <a:t>    │   ├── reviewer.md · qa.md</a:t>
+              <a:t>    │   ├── 기본 4: init-project · start-session · handoff · status</a:t>
             </a:r>
           </a:p>
           <a:p>
@@ -13549,7 +17074,7 @@
                 </a:solidFill>
                 <a:latin typeface="D2Coding, Consolas, Menlo"/>
               </a:rPr>
-              <a:t>    ├── commands/             ← 슬래시 커맨드 4개</a:t>
+              <a:t>    │   ├── Phase 1 (6): freeze · unfreeze · guard · learn</a:t>
             </a:r>
           </a:p>
           <a:p>
@@ -13561,7 +17086,7 @@
                 </a:solidFill>
                 <a:latin typeface="D2Coding, Consolas, Menlo"/>
               </a:rPr>
-              <a:t>    │   ├── init-project.md · start-session.md</a:t>
+              <a:t>    │   │                context-save · context-restore</a:t>
             </a:r>
           </a:p>
           <a:p>
@@ -13573,7 +17098,7 @@
                 </a:solidFill>
                 <a:latin typeface="D2Coding, Consolas, Menlo"/>
               </a:rPr>
-              <a:t>    │   ├── handoff.md · status.md</a:t>
+              <a:t>    │   ├── Phase 2 (3): plan-full · ship · retro</a:t>
             </a:r>
           </a:p>
           <a:p>
@@ -13585,7 +17110,7 @@
                 </a:solidFill>
                 <a:latin typeface="D2Coding, Consolas, Menlo"/>
               </a:rPr>
-              <a:t>    ├── hooks/                ← 자동 안전장치 4개</a:t>
+              <a:t>    │   └── Phase 3 (4): brain-sync · brain-search · brain-stats · brain-list</a:t>
             </a:r>
           </a:p>
           <a:p>
@@ -13597,7 +17122,7 @@
                 </a:solidFill>
                 <a:latin typeface="D2Coding, Consolas, Menlo"/>
               </a:rPr>
-              <a:t>    │   ├── pre-bash-check.sh · pre-write-check.sh</a:t>
+              <a:t>    ├── hooks/                ← 자동 안전장치 5개 (pre-edit-freeze-check 추가)</a:t>
             </a:r>
           </a:p>
           <a:p>
@@ -13609,7 +17134,7 @@
                 </a:solidFill>
                 <a:latin typeface="D2Coding, Consolas, Menlo"/>
               </a:rPr>
-              <a:t>    │   ├── post-write-check.sh · session-end.sh</a:t>
+              <a:t>    ├── bin/                  ← 헬퍼 스크립트  (Phase 3)</a:t>
             </a:r>
           </a:p>
           <a:p>
@@ -13621,7 +17146,7 @@
                 </a:solidFill>
                 <a:latin typeface="D2Coding, Consolas, Menlo"/>
               </a:rPr>
-              <a:t>    ├── skills/               ← 에이전트용 참조 스킬</a:t>
+              <a:t>    │   └── brain.py          ← SQLite 기반 cross-project 지식</a:t>
             </a:r>
           </a:p>
           <a:p>
@@ -13633,7 +17158,7 @@
                 </a:solidFill>
                 <a:latin typeface="D2Coding, Consolas, Menlo"/>
               </a:rPr>
-              <a:t>    │   └── planning · coding · testing</a:t>
+              <a:t>    ├── state/                ← 프로젝트 로컬 상태 (Phase 1·2)</a:t>
             </a:r>
           </a:p>
           <a:p>
@@ -13645,7 +17170,7 @@
                 </a:solidFill>
                 <a:latin typeface="D2Coding, Consolas, Menlo"/>
               </a:rPr>
-              <a:t>    └── rules/                ← 팀 규칙</a:t>
+              <a:t>    │   ├── learnings.jsonl · analytics.jsonl</a:t>
             </a:r>
           </a:p>
           <a:p>
@@ -13657,7 +17182,31 @@
                 </a:solidFill>
                 <a:latin typeface="D2Coding, Consolas, Menlo"/>
               </a:rPr>
-              <a:t>        └── coding-standards.md · git-conventions.md</a:t>
+              <a:t>    │   ├── checkpoints/*.md  · freeze-dir.txt (gitignore)</a:t>
+            </a:r>
+          </a:p>
+          <a:p>
+            <a:pPr algn="l"/>
+            <a:r>
+              <a:rPr sz="1200">
+                <a:solidFill>
+                  <a:srgbClr val="E5E7EB"/>
+                </a:solidFill>
+                <a:latin typeface="D2Coding, Consolas, Menlo"/>
+              </a:rPr>
+              <a:t>    ├── skills/               ← planning · coding · testing</a:t>
+            </a:r>
+          </a:p>
+          <a:p>
+            <a:pPr algn="l"/>
+            <a:r>
+              <a:rPr sz="1200">
+                <a:solidFill>
+                  <a:srgbClr val="E5E7EB"/>
+                </a:solidFill>
+                <a:latin typeface="D2Coding, Consolas, Menlo"/>
+              </a:rPr>
+              <a:t>    └── rules/                ← coding-standards · git-conventions</a:t>
             </a:r>
           </a:p>
         </p:txBody>
@@ -13912,7 +17461,7 @@
                 </a:solidFill>
                 <a:latin typeface="맑은 고딕"/>
               </a:rPr>
-              <a:t>6 / 14</a:t>
+              <a:t>6 / 17</a:t>
             </a:r>
           </a:p>
         </p:txBody>
@@ -15758,7 +19307,7 @@
                 </a:solidFill>
                 <a:latin typeface="맑은 고딕"/>
               </a:rPr>
-              <a:t>7 / 14</a:t>
+              <a:t>7 / 17</a:t>
             </a:r>
           </a:p>
         </p:txBody>
@@ -17132,7 +20681,7 @@
                 </a:solidFill>
                 <a:latin typeface="맑은 고딕"/>
               </a:rPr>
-              <a:t>슬래시 커맨드 4개</a:t>
+              <a:t>기본 슬래시 커맨드 4개  +  Phase 1·2·3 업그레이드 13개</a:t>
             </a:r>
           </a:p>
         </p:txBody>
@@ -17211,7 +20760,7 @@
                 </a:solidFill>
                 <a:latin typeface="맑은 고딕"/>
               </a:rPr>
-              <a:t>8 / 14</a:t>
+              <a:t>8 / 17</a:t>
             </a:r>
           </a:p>
         </p:txBody>
@@ -18385,7 +21934,7 @@
                 </a:solidFill>
                 <a:latin typeface="맑은 고딕"/>
               </a:rPr>
-              <a:t>9 / 14</a:t>
+              <a:t>12 / 17</a:t>
             </a:r>
           </a:p>
         </p:txBody>
